--- a/03_slide_presentasi/PERTEMUAN_02_Modern_Dart_Programming.pptx
+++ b/03_slide_presentasi/PERTEMUAN_02_Modern_Dart_Programming.pptx
@@ -3924,8 +3924,8 @@
         </p:nvSpPr>
         <p:spPr>
           <a:xfrm>
-            <a:off x="5669280" y="2176272"/>
-            <a:ext cx="5486400" cy="3977639"/>
+            <a:off x="5669280" y="2121408"/>
+            <a:ext cx="5486400" cy="3364992"/>
           </a:xfrm>
           <a:prstGeom prst="rect">
             <a:avLst/>
@@ -3939,7 +3939,7 @@
           <a:lstStyle/>
           <a:p>
             <a:pPr>
-              <a:defRPr sz="980">
+              <a:defRPr sz="919">
                 <a:solidFill>
                   <a:srgbClr val="F5F5F5"/>
                 </a:solidFill>
@@ -3993,6 +3993,142 @@
             <a:br/>
             <a:r>
               <a:t>}</a:t>
+            </a:r>
+          </a:p>
+        </p:txBody>
+      </p:sp>
+      <p:sp>
+        <p:nvSpPr>
+          <p:cNvPr id="15" name="Rectangle 14"/>
+          <p:cNvSpPr/>
+          <p:nvPr/>
+        </p:nvSpPr>
+        <p:spPr>
+          <a:xfrm>
+            <a:off x="5660136" y="5669280"/>
+            <a:ext cx="5608015" cy="548640"/>
+          </a:xfrm>
+          <a:prstGeom prst="rect">
+            <a:avLst/>
+          </a:prstGeom>
+          <a:solidFill>
+            <a:srgbClr val="000000"/>
+          </a:solidFill>
+          <a:ln>
+            <a:noFill/>
+          </a:ln>
+        </p:spPr>
+        <p:style>
+          <a:lnRef idx="1">
+            <a:schemeClr val="accent1"/>
+          </a:lnRef>
+          <a:fillRef idx="3">
+            <a:schemeClr val="accent1"/>
+          </a:fillRef>
+          <a:effectRef idx="2">
+            <a:schemeClr val="accent1"/>
+          </a:effectRef>
+          <a:fontRef idx="minor">
+            <a:schemeClr val="lt1"/>
+          </a:fontRef>
+        </p:style>
+        <p:txBody>
+          <a:bodyPr rtlCol="0" anchor="ctr"/>
+          <a:lstStyle/>
+          <a:p>
+            <a:pPr algn="ctr"/>
+          </a:p>
+        </p:txBody>
+      </p:sp>
+      <p:sp>
+        <p:nvSpPr>
+          <p:cNvPr id="16" name="Rectangle 15"/>
+          <p:cNvSpPr/>
+          <p:nvPr/>
+        </p:nvSpPr>
+        <p:spPr>
+          <a:xfrm>
+            <a:off x="5623560" y="5632704"/>
+            <a:ext cx="5608015" cy="548640"/>
+          </a:xfrm>
+          <a:prstGeom prst="rect">
+            <a:avLst/>
+          </a:prstGeom>
+          <a:solidFill>
+            <a:srgbClr val="FFE600"/>
+          </a:solidFill>
+          <a:ln w="25400">
+            <a:solidFill>
+              <a:srgbClr val="000000"/>
+            </a:solidFill>
+          </a:ln>
+        </p:spPr>
+        <p:style>
+          <a:lnRef idx="1">
+            <a:schemeClr val="accent1"/>
+          </a:lnRef>
+          <a:fillRef idx="3">
+            <a:schemeClr val="accent1"/>
+          </a:fillRef>
+          <a:effectRef idx="2">
+            <a:schemeClr val="accent1"/>
+          </a:effectRef>
+          <a:fontRef idx="minor">
+            <a:schemeClr val="lt1"/>
+          </a:fontRef>
+        </p:style>
+        <p:txBody>
+          <a:bodyPr rtlCol="0" anchor="ctr"/>
+          <a:lstStyle/>
+          <a:p>
+            <a:pPr algn="ctr"/>
+          </a:p>
+        </p:txBody>
+      </p:sp>
+      <p:sp>
+        <p:nvSpPr>
+          <p:cNvPr id="17" name="TextBox 16"/>
+          <p:cNvSpPr txBox="1"/>
+          <p:nvPr/>
+        </p:nvSpPr>
+        <p:spPr>
+          <a:xfrm>
+            <a:off x="5696712" y="5660136"/>
+            <a:ext cx="5461711" cy="493776"/>
+          </a:xfrm>
+          <a:prstGeom prst="rect">
+            <a:avLst/>
+          </a:prstGeom>
+          <a:noFill/>
+        </p:spPr>
+        <p:txBody>
+          <a:bodyPr wrap="square">
+            <a:spAutoFit/>
+          </a:bodyPr>
+          <a:lstStyle/>
+          <a:p>
+            <a:r>
+              <a:rPr sz="960" b="1">
+                <a:solidFill>
+                  <a:srgbClr val="000000"/>
+                </a:solidFill>
+                <a:latin typeface="Segoe UI"/>
+                <a:hlinkClick r:id="rId2"/>
+              </a:rPr>
+              <a:t>▶ BUKA KODE LENGKAP DI GITHUB (slide_10_extension_methods.dart)</a:t>
+            </a:r>
+          </a:p>
+          <a:p>
+            <a:pPr>
+              <a:defRPr sz="760">
+                <a:solidFill>
+                  <a:srgbClr val="3C3C3C"/>
+                </a:solidFill>
+                <a:latin typeface="Segoe UI"/>
+              </a:defRPr>
+            </a:pPr>
+            <a:r>
+              <a:t>💡 Buka di browser / salin source code: github.com/antonprafanto/mobile2026</a:t>
             </a:r>
           </a:p>
         </p:txBody>
@@ -4583,8 +4719,8 @@
         </p:nvSpPr>
         <p:spPr>
           <a:xfrm>
-            <a:off x="5669280" y="2176272"/>
-            <a:ext cx="5486400" cy="3977639"/>
+            <a:off x="5669280" y="2121408"/>
+            <a:ext cx="5486400" cy="3364992"/>
           </a:xfrm>
           <a:prstGeom prst="rect">
             <a:avLst/>
@@ -4598,7 +4734,7 @@
           <a:lstStyle/>
           <a:p>
             <a:pPr>
-              <a:defRPr sz="980">
+              <a:defRPr sz="919">
                 <a:solidFill>
                   <a:srgbClr val="F5F5F5"/>
                 </a:solidFill>
@@ -4649,6 +4785,142 @@
             <a:br/>
             <a:r>
               <a:t>}</a:t>
+            </a:r>
+          </a:p>
+        </p:txBody>
+      </p:sp>
+      <p:sp>
+        <p:nvSpPr>
+          <p:cNvPr id="15" name="Rectangle 14"/>
+          <p:cNvSpPr/>
+          <p:nvPr/>
+        </p:nvSpPr>
+        <p:spPr>
+          <a:xfrm>
+            <a:off x="5660136" y="5669280"/>
+            <a:ext cx="5608015" cy="548640"/>
+          </a:xfrm>
+          <a:prstGeom prst="rect">
+            <a:avLst/>
+          </a:prstGeom>
+          <a:solidFill>
+            <a:srgbClr val="000000"/>
+          </a:solidFill>
+          <a:ln>
+            <a:noFill/>
+          </a:ln>
+        </p:spPr>
+        <p:style>
+          <a:lnRef idx="1">
+            <a:schemeClr val="accent1"/>
+          </a:lnRef>
+          <a:fillRef idx="3">
+            <a:schemeClr val="accent1"/>
+          </a:fillRef>
+          <a:effectRef idx="2">
+            <a:schemeClr val="accent1"/>
+          </a:effectRef>
+          <a:fontRef idx="minor">
+            <a:schemeClr val="lt1"/>
+          </a:fontRef>
+        </p:style>
+        <p:txBody>
+          <a:bodyPr rtlCol="0" anchor="ctr"/>
+          <a:lstStyle/>
+          <a:p>
+            <a:pPr algn="ctr"/>
+          </a:p>
+        </p:txBody>
+      </p:sp>
+      <p:sp>
+        <p:nvSpPr>
+          <p:cNvPr id="16" name="Rectangle 15"/>
+          <p:cNvSpPr/>
+          <p:nvPr/>
+        </p:nvSpPr>
+        <p:spPr>
+          <a:xfrm>
+            <a:off x="5623560" y="5632704"/>
+            <a:ext cx="5608015" cy="548640"/>
+          </a:xfrm>
+          <a:prstGeom prst="rect">
+            <a:avLst/>
+          </a:prstGeom>
+          <a:solidFill>
+            <a:srgbClr val="FFE600"/>
+          </a:solidFill>
+          <a:ln w="25400">
+            <a:solidFill>
+              <a:srgbClr val="000000"/>
+            </a:solidFill>
+          </a:ln>
+        </p:spPr>
+        <p:style>
+          <a:lnRef idx="1">
+            <a:schemeClr val="accent1"/>
+          </a:lnRef>
+          <a:fillRef idx="3">
+            <a:schemeClr val="accent1"/>
+          </a:fillRef>
+          <a:effectRef idx="2">
+            <a:schemeClr val="accent1"/>
+          </a:effectRef>
+          <a:fontRef idx="minor">
+            <a:schemeClr val="lt1"/>
+          </a:fontRef>
+        </p:style>
+        <p:txBody>
+          <a:bodyPr rtlCol="0" anchor="ctr"/>
+          <a:lstStyle/>
+          <a:p>
+            <a:pPr algn="ctr"/>
+          </a:p>
+        </p:txBody>
+      </p:sp>
+      <p:sp>
+        <p:nvSpPr>
+          <p:cNvPr id="17" name="TextBox 16"/>
+          <p:cNvSpPr txBox="1"/>
+          <p:nvPr/>
+        </p:nvSpPr>
+        <p:spPr>
+          <a:xfrm>
+            <a:off x="5696712" y="5660136"/>
+            <a:ext cx="5461711" cy="493776"/>
+          </a:xfrm>
+          <a:prstGeom prst="rect">
+            <a:avLst/>
+          </a:prstGeom>
+          <a:noFill/>
+        </p:spPr>
+        <p:txBody>
+          <a:bodyPr wrap="square">
+            <a:spAutoFit/>
+          </a:bodyPr>
+          <a:lstStyle/>
+          <a:p>
+            <a:r>
+              <a:rPr sz="960" b="1">
+                <a:solidFill>
+                  <a:srgbClr val="000000"/>
+                </a:solidFill>
+                <a:latin typeface="Segoe UI"/>
+                <a:hlinkClick r:id="rId2"/>
+              </a:rPr>
+              <a:t>▶ BUKA KODE LENGKAP DI GITHUB (slide_11_collections_list_map_set.dart)</a:t>
+            </a:r>
+          </a:p>
+          <a:p>
+            <a:pPr>
+              <a:defRPr sz="760">
+                <a:solidFill>
+                  <a:srgbClr val="3C3C3C"/>
+                </a:solidFill>
+                <a:latin typeface="Segoe UI"/>
+              </a:defRPr>
+            </a:pPr>
+            <a:r>
+              <a:t>💡 Buka di browser / salin source code: github.com/antonprafanto/mobile2026</a:t>
             </a:r>
           </a:p>
         </p:txBody>
@@ -5255,8 +5527,8 @@
         </p:nvSpPr>
         <p:spPr>
           <a:xfrm>
-            <a:off x="5669280" y="2176272"/>
-            <a:ext cx="5486400" cy="3977639"/>
+            <a:off x="5669280" y="2121408"/>
+            <a:ext cx="5486400" cy="3364992"/>
           </a:xfrm>
           <a:prstGeom prst="rect">
             <a:avLst/>
@@ -5270,7 +5542,7 @@
           <a:lstStyle/>
           <a:p>
             <a:pPr>
-              <a:defRPr sz="980">
+              <a:defRPr sz="919">
                 <a:solidFill>
                   <a:srgbClr val="F5F5F5"/>
                 </a:solidFill>
@@ -5313,6 +5585,142 @@
             <a:br/>
             <a:r>
               <a:t>}</a:t>
+            </a:r>
+          </a:p>
+        </p:txBody>
+      </p:sp>
+      <p:sp>
+        <p:nvSpPr>
+          <p:cNvPr id="15" name="Rectangle 14"/>
+          <p:cNvSpPr/>
+          <p:nvPr/>
+        </p:nvSpPr>
+        <p:spPr>
+          <a:xfrm>
+            <a:off x="5660136" y="5669280"/>
+            <a:ext cx="5608015" cy="548640"/>
+          </a:xfrm>
+          <a:prstGeom prst="rect">
+            <a:avLst/>
+          </a:prstGeom>
+          <a:solidFill>
+            <a:srgbClr val="000000"/>
+          </a:solidFill>
+          <a:ln>
+            <a:noFill/>
+          </a:ln>
+        </p:spPr>
+        <p:style>
+          <a:lnRef idx="1">
+            <a:schemeClr val="accent1"/>
+          </a:lnRef>
+          <a:fillRef idx="3">
+            <a:schemeClr val="accent1"/>
+          </a:fillRef>
+          <a:effectRef idx="2">
+            <a:schemeClr val="accent1"/>
+          </a:effectRef>
+          <a:fontRef idx="minor">
+            <a:schemeClr val="lt1"/>
+          </a:fontRef>
+        </p:style>
+        <p:txBody>
+          <a:bodyPr rtlCol="0" anchor="ctr"/>
+          <a:lstStyle/>
+          <a:p>
+            <a:pPr algn="ctr"/>
+          </a:p>
+        </p:txBody>
+      </p:sp>
+      <p:sp>
+        <p:nvSpPr>
+          <p:cNvPr id="16" name="Rectangle 15"/>
+          <p:cNvSpPr/>
+          <p:nvPr/>
+        </p:nvSpPr>
+        <p:spPr>
+          <a:xfrm>
+            <a:off x="5623560" y="5632704"/>
+            <a:ext cx="5608015" cy="548640"/>
+          </a:xfrm>
+          <a:prstGeom prst="rect">
+            <a:avLst/>
+          </a:prstGeom>
+          <a:solidFill>
+            <a:srgbClr val="FFE600"/>
+          </a:solidFill>
+          <a:ln w="25400">
+            <a:solidFill>
+              <a:srgbClr val="000000"/>
+            </a:solidFill>
+          </a:ln>
+        </p:spPr>
+        <p:style>
+          <a:lnRef idx="1">
+            <a:schemeClr val="accent1"/>
+          </a:lnRef>
+          <a:fillRef idx="3">
+            <a:schemeClr val="accent1"/>
+          </a:fillRef>
+          <a:effectRef idx="2">
+            <a:schemeClr val="accent1"/>
+          </a:effectRef>
+          <a:fontRef idx="minor">
+            <a:schemeClr val="lt1"/>
+          </a:fontRef>
+        </p:style>
+        <p:txBody>
+          <a:bodyPr rtlCol="0" anchor="ctr"/>
+          <a:lstStyle/>
+          <a:p>
+            <a:pPr algn="ctr"/>
+          </a:p>
+        </p:txBody>
+      </p:sp>
+      <p:sp>
+        <p:nvSpPr>
+          <p:cNvPr id="17" name="TextBox 16"/>
+          <p:cNvSpPr txBox="1"/>
+          <p:nvPr/>
+        </p:nvSpPr>
+        <p:spPr>
+          <a:xfrm>
+            <a:off x="5696712" y="5660136"/>
+            <a:ext cx="5461711" cy="493776"/>
+          </a:xfrm>
+          <a:prstGeom prst="rect">
+            <a:avLst/>
+          </a:prstGeom>
+          <a:noFill/>
+        </p:spPr>
+        <p:txBody>
+          <a:bodyPr wrap="square">
+            <a:spAutoFit/>
+          </a:bodyPr>
+          <a:lstStyle/>
+          <a:p>
+            <a:r>
+              <a:rPr sz="960" b="1">
+                <a:solidFill>
+                  <a:srgbClr val="000000"/>
+                </a:solidFill>
+                <a:latin typeface="Segoe UI"/>
+                <a:hlinkClick r:id="rId2"/>
+              </a:rPr>
+              <a:t>▶ BUKA KODE LENGKAP DI GITHUB (slide_12_reactive_collections.dart)</a:t>
+            </a:r>
+          </a:p>
+          <a:p>
+            <a:pPr>
+              <a:defRPr sz="760">
+                <a:solidFill>
+                  <a:srgbClr val="3C3C3C"/>
+                </a:solidFill>
+                <a:latin typeface="Segoe UI"/>
+              </a:defRPr>
+            </a:pPr>
+            <a:r>
+              <a:t>💡 Buka di browser / salin source code: github.com/antonprafanto/mobile2026</a:t>
             </a:r>
           </a:p>
         </p:txBody>
@@ -5919,8 +6327,8 @@
         </p:nvSpPr>
         <p:spPr>
           <a:xfrm>
-            <a:off x="5669280" y="2176272"/>
-            <a:ext cx="5486400" cy="3977639"/>
+            <a:off x="5669280" y="2121408"/>
+            <a:ext cx="5486400" cy="3364992"/>
           </a:xfrm>
           <a:prstGeom prst="rect">
             <a:avLst/>
@@ -5934,7 +6342,7 @@
           <a:lstStyle/>
           <a:p>
             <a:pPr>
-              <a:defRPr sz="980">
+              <a:defRPr sz="919">
                 <a:solidFill>
                   <a:srgbClr val="F5F5F5"/>
                 </a:solidFill>
@@ -5984,6 +6392,142 @@
             <a:br/>
             <a:r>
               <a:t>}</a:t>
+            </a:r>
+          </a:p>
+        </p:txBody>
+      </p:sp>
+      <p:sp>
+        <p:nvSpPr>
+          <p:cNvPr id="15" name="Rectangle 14"/>
+          <p:cNvSpPr/>
+          <p:nvPr/>
+        </p:nvSpPr>
+        <p:spPr>
+          <a:xfrm>
+            <a:off x="5660136" y="5669280"/>
+            <a:ext cx="5608015" cy="548640"/>
+          </a:xfrm>
+          <a:prstGeom prst="rect">
+            <a:avLst/>
+          </a:prstGeom>
+          <a:solidFill>
+            <a:srgbClr val="000000"/>
+          </a:solidFill>
+          <a:ln>
+            <a:noFill/>
+          </a:ln>
+        </p:spPr>
+        <p:style>
+          <a:lnRef idx="1">
+            <a:schemeClr val="accent1"/>
+          </a:lnRef>
+          <a:fillRef idx="3">
+            <a:schemeClr val="accent1"/>
+          </a:fillRef>
+          <a:effectRef idx="2">
+            <a:schemeClr val="accent1"/>
+          </a:effectRef>
+          <a:fontRef idx="minor">
+            <a:schemeClr val="lt1"/>
+          </a:fontRef>
+        </p:style>
+        <p:txBody>
+          <a:bodyPr rtlCol="0" anchor="ctr"/>
+          <a:lstStyle/>
+          <a:p>
+            <a:pPr algn="ctr"/>
+          </a:p>
+        </p:txBody>
+      </p:sp>
+      <p:sp>
+        <p:nvSpPr>
+          <p:cNvPr id="16" name="Rectangle 15"/>
+          <p:cNvSpPr/>
+          <p:nvPr/>
+        </p:nvSpPr>
+        <p:spPr>
+          <a:xfrm>
+            <a:off x="5623560" y="5632704"/>
+            <a:ext cx="5608015" cy="548640"/>
+          </a:xfrm>
+          <a:prstGeom prst="rect">
+            <a:avLst/>
+          </a:prstGeom>
+          <a:solidFill>
+            <a:srgbClr val="FFE600"/>
+          </a:solidFill>
+          <a:ln w="25400">
+            <a:solidFill>
+              <a:srgbClr val="000000"/>
+            </a:solidFill>
+          </a:ln>
+        </p:spPr>
+        <p:style>
+          <a:lnRef idx="1">
+            <a:schemeClr val="accent1"/>
+          </a:lnRef>
+          <a:fillRef idx="3">
+            <a:schemeClr val="accent1"/>
+          </a:fillRef>
+          <a:effectRef idx="2">
+            <a:schemeClr val="accent1"/>
+          </a:effectRef>
+          <a:fontRef idx="minor">
+            <a:schemeClr val="lt1"/>
+          </a:fontRef>
+        </p:style>
+        <p:txBody>
+          <a:bodyPr rtlCol="0" anchor="ctr"/>
+          <a:lstStyle/>
+          <a:p>
+            <a:pPr algn="ctr"/>
+          </a:p>
+        </p:txBody>
+      </p:sp>
+      <p:sp>
+        <p:nvSpPr>
+          <p:cNvPr id="17" name="TextBox 16"/>
+          <p:cNvSpPr txBox="1"/>
+          <p:nvPr/>
+        </p:nvSpPr>
+        <p:spPr>
+          <a:xfrm>
+            <a:off x="5696712" y="5660136"/>
+            <a:ext cx="5461711" cy="493776"/>
+          </a:xfrm>
+          <a:prstGeom prst="rect">
+            <a:avLst/>
+          </a:prstGeom>
+          <a:noFill/>
+        </p:spPr>
+        <p:txBody>
+          <a:bodyPr wrap="square">
+            <a:spAutoFit/>
+          </a:bodyPr>
+          <a:lstStyle/>
+          <a:p>
+            <a:r>
+              <a:rPr sz="960" b="1">
+                <a:solidFill>
+                  <a:srgbClr val="000000"/>
+                </a:solidFill>
+                <a:latin typeface="Segoe UI"/>
+                <a:hlinkClick r:id="rId2"/>
+              </a:rPr>
+              <a:t>▶ BUKA KODE LENGKAP DI GITHUB (slide_13_dilema_sync_vs_async.dart)</a:t>
+            </a:r>
+          </a:p>
+          <a:p>
+            <a:pPr>
+              <a:defRPr sz="760">
+                <a:solidFill>
+                  <a:srgbClr val="3C3C3C"/>
+                </a:solidFill>
+                <a:latin typeface="Segoe UI"/>
+              </a:defRPr>
+            </a:pPr>
+            <a:r>
+              <a:t>💡 Buka di browser / salin source code: github.com/antonprafanto/mobile2026</a:t>
             </a:r>
           </a:p>
         </p:txBody>
@@ -6590,8 +7134,8 @@
         </p:nvSpPr>
         <p:spPr>
           <a:xfrm>
-            <a:off x="5669280" y="2176272"/>
-            <a:ext cx="5486400" cy="3977639"/>
+            <a:off x="5669280" y="2121408"/>
+            <a:ext cx="5486400" cy="3364992"/>
           </a:xfrm>
           <a:prstGeom prst="rect">
             <a:avLst/>
@@ -6605,7 +7149,7 @@
           <a:lstStyle/>
           <a:p>
             <a:pPr>
-              <a:defRPr sz="980">
+              <a:defRPr sz="919">
                 <a:solidFill>
                   <a:srgbClr val="F5F5F5"/>
                 </a:solidFill>
@@ -6671,6 +7215,142 @@
             <a:br/>
             <a:r>
               <a:t>}</a:t>
+            </a:r>
+          </a:p>
+        </p:txBody>
+      </p:sp>
+      <p:sp>
+        <p:nvSpPr>
+          <p:cNvPr id="15" name="Rectangle 14"/>
+          <p:cNvSpPr/>
+          <p:nvPr/>
+        </p:nvSpPr>
+        <p:spPr>
+          <a:xfrm>
+            <a:off x="5660136" y="5669280"/>
+            <a:ext cx="5608015" cy="548640"/>
+          </a:xfrm>
+          <a:prstGeom prst="rect">
+            <a:avLst/>
+          </a:prstGeom>
+          <a:solidFill>
+            <a:srgbClr val="000000"/>
+          </a:solidFill>
+          <a:ln>
+            <a:noFill/>
+          </a:ln>
+        </p:spPr>
+        <p:style>
+          <a:lnRef idx="1">
+            <a:schemeClr val="accent1"/>
+          </a:lnRef>
+          <a:fillRef idx="3">
+            <a:schemeClr val="accent1"/>
+          </a:fillRef>
+          <a:effectRef idx="2">
+            <a:schemeClr val="accent1"/>
+          </a:effectRef>
+          <a:fontRef idx="minor">
+            <a:schemeClr val="lt1"/>
+          </a:fontRef>
+        </p:style>
+        <p:txBody>
+          <a:bodyPr rtlCol="0" anchor="ctr"/>
+          <a:lstStyle/>
+          <a:p>
+            <a:pPr algn="ctr"/>
+          </a:p>
+        </p:txBody>
+      </p:sp>
+      <p:sp>
+        <p:nvSpPr>
+          <p:cNvPr id="16" name="Rectangle 15"/>
+          <p:cNvSpPr/>
+          <p:nvPr/>
+        </p:nvSpPr>
+        <p:spPr>
+          <a:xfrm>
+            <a:off x="5623560" y="5632704"/>
+            <a:ext cx="5608015" cy="548640"/>
+          </a:xfrm>
+          <a:prstGeom prst="rect">
+            <a:avLst/>
+          </a:prstGeom>
+          <a:solidFill>
+            <a:srgbClr val="FFE600"/>
+          </a:solidFill>
+          <a:ln w="25400">
+            <a:solidFill>
+              <a:srgbClr val="000000"/>
+            </a:solidFill>
+          </a:ln>
+        </p:spPr>
+        <p:style>
+          <a:lnRef idx="1">
+            <a:schemeClr val="accent1"/>
+          </a:lnRef>
+          <a:fillRef idx="3">
+            <a:schemeClr val="accent1"/>
+          </a:fillRef>
+          <a:effectRef idx="2">
+            <a:schemeClr val="accent1"/>
+          </a:effectRef>
+          <a:fontRef idx="minor">
+            <a:schemeClr val="lt1"/>
+          </a:fontRef>
+        </p:style>
+        <p:txBody>
+          <a:bodyPr rtlCol="0" anchor="ctr"/>
+          <a:lstStyle/>
+          <a:p>
+            <a:pPr algn="ctr"/>
+          </a:p>
+        </p:txBody>
+      </p:sp>
+      <p:sp>
+        <p:nvSpPr>
+          <p:cNvPr id="17" name="TextBox 16"/>
+          <p:cNvSpPr txBox="1"/>
+          <p:nvPr/>
+        </p:nvSpPr>
+        <p:spPr>
+          <a:xfrm>
+            <a:off x="5696712" y="5660136"/>
+            <a:ext cx="5461711" cy="493776"/>
+          </a:xfrm>
+          <a:prstGeom prst="rect">
+            <a:avLst/>
+          </a:prstGeom>
+          <a:noFill/>
+        </p:spPr>
+        <p:txBody>
+          <a:bodyPr wrap="square">
+            <a:spAutoFit/>
+          </a:bodyPr>
+          <a:lstStyle/>
+          <a:p>
+            <a:r>
+              <a:rPr sz="960" b="1">
+                <a:solidFill>
+                  <a:srgbClr val="000000"/>
+                </a:solidFill>
+                <a:latin typeface="Segoe UI"/>
+                <a:hlinkClick r:id="rId2"/>
+              </a:rPr>
+              <a:t>▶ BUKA KODE LENGKAP DI GITHUB (slide_14_future_async_await.dart)</a:t>
+            </a:r>
+          </a:p>
+          <a:p>
+            <a:pPr>
+              <a:defRPr sz="760">
+                <a:solidFill>
+                  <a:srgbClr val="3C3C3C"/>
+                </a:solidFill>
+                <a:latin typeface="Segoe UI"/>
+              </a:defRPr>
+            </a:pPr>
+            <a:r>
+              <a:t>💡 Buka di browser / salin source code: github.com/antonprafanto/mobile2026</a:t>
             </a:r>
           </a:p>
         </p:txBody>
@@ -7277,8 +7957,8 @@
         </p:nvSpPr>
         <p:spPr>
           <a:xfrm>
-            <a:off x="5669280" y="2176272"/>
-            <a:ext cx="5486400" cy="3977639"/>
+            <a:off x="5669280" y="2121408"/>
+            <a:ext cx="5486400" cy="3364992"/>
           </a:xfrm>
           <a:prstGeom prst="rect">
             <a:avLst/>
@@ -7292,7 +7972,7 @@
           <a:lstStyle/>
           <a:p>
             <a:pPr>
-              <a:defRPr sz="980">
+              <a:defRPr sz="919">
                 <a:solidFill>
                   <a:srgbClr val="F5F5F5"/>
                 </a:solidFill>
@@ -7354,6 +8034,142 @@
             <a:br/>
             <a:r>
               <a:t>}</a:t>
+            </a:r>
+          </a:p>
+        </p:txBody>
+      </p:sp>
+      <p:sp>
+        <p:nvSpPr>
+          <p:cNvPr id="15" name="Rectangle 14"/>
+          <p:cNvSpPr/>
+          <p:nvPr/>
+        </p:nvSpPr>
+        <p:spPr>
+          <a:xfrm>
+            <a:off x="5660136" y="5669280"/>
+            <a:ext cx="5608015" cy="548640"/>
+          </a:xfrm>
+          <a:prstGeom prst="rect">
+            <a:avLst/>
+          </a:prstGeom>
+          <a:solidFill>
+            <a:srgbClr val="000000"/>
+          </a:solidFill>
+          <a:ln>
+            <a:noFill/>
+          </a:ln>
+        </p:spPr>
+        <p:style>
+          <a:lnRef idx="1">
+            <a:schemeClr val="accent1"/>
+          </a:lnRef>
+          <a:fillRef idx="3">
+            <a:schemeClr val="accent1"/>
+          </a:fillRef>
+          <a:effectRef idx="2">
+            <a:schemeClr val="accent1"/>
+          </a:effectRef>
+          <a:fontRef idx="minor">
+            <a:schemeClr val="lt1"/>
+          </a:fontRef>
+        </p:style>
+        <p:txBody>
+          <a:bodyPr rtlCol="0" anchor="ctr"/>
+          <a:lstStyle/>
+          <a:p>
+            <a:pPr algn="ctr"/>
+          </a:p>
+        </p:txBody>
+      </p:sp>
+      <p:sp>
+        <p:nvSpPr>
+          <p:cNvPr id="16" name="Rectangle 15"/>
+          <p:cNvSpPr/>
+          <p:nvPr/>
+        </p:nvSpPr>
+        <p:spPr>
+          <a:xfrm>
+            <a:off x="5623560" y="5632704"/>
+            <a:ext cx="5608015" cy="548640"/>
+          </a:xfrm>
+          <a:prstGeom prst="rect">
+            <a:avLst/>
+          </a:prstGeom>
+          <a:solidFill>
+            <a:srgbClr val="FFE600"/>
+          </a:solidFill>
+          <a:ln w="25400">
+            <a:solidFill>
+              <a:srgbClr val="000000"/>
+            </a:solidFill>
+          </a:ln>
+        </p:spPr>
+        <p:style>
+          <a:lnRef idx="1">
+            <a:schemeClr val="accent1"/>
+          </a:lnRef>
+          <a:fillRef idx="3">
+            <a:schemeClr val="accent1"/>
+          </a:fillRef>
+          <a:effectRef idx="2">
+            <a:schemeClr val="accent1"/>
+          </a:effectRef>
+          <a:fontRef idx="minor">
+            <a:schemeClr val="lt1"/>
+          </a:fontRef>
+        </p:style>
+        <p:txBody>
+          <a:bodyPr rtlCol="0" anchor="ctr"/>
+          <a:lstStyle/>
+          <a:p>
+            <a:pPr algn="ctr"/>
+          </a:p>
+        </p:txBody>
+      </p:sp>
+      <p:sp>
+        <p:nvSpPr>
+          <p:cNvPr id="17" name="TextBox 16"/>
+          <p:cNvSpPr txBox="1"/>
+          <p:nvPr/>
+        </p:nvSpPr>
+        <p:spPr>
+          <a:xfrm>
+            <a:off x="5696712" y="5660136"/>
+            <a:ext cx="5461711" cy="493776"/>
+          </a:xfrm>
+          <a:prstGeom prst="rect">
+            <a:avLst/>
+          </a:prstGeom>
+          <a:noFill/>
+        </p:spPr>
+        <p:txBody>
+          <a:bodyPr wrap="square">
+            <a:spAutoFit/>
+          </a:bodyPr>
+          <a:lstStyle/>
+          <a:p>
+            <a:r>
+              <a:rPr sz="960" b="1">
+                <a:solidFill>
+                  <a:srgbClr val="000000"/>
+                </a:solidFill>
+                <a:latin typeface="Segoe UI"/>
+                <a:hlinkClick r:id="rId2"/>
+              </a:rPr>
+              <a:t>▶ BUKA KODE LENGKAP DI GITHUB (slide_15_stream_reactive_data.dart)</a:t>
+            </a:r>
+          </a:p>
+          <a:p>
+            <a:pPr>
+              <a:defRPr sz="760">
+                <a:solidFill>
+                  <a:srgbClr val="3C3C3C"/>
+                </a:solidFill>
+                <a:latin typeface="Segoe UI"/>
+              </a:defRPr>
+            </a:pPr>
+            <a:r>
+              <a:t>💡 Buka di browser / salin source code: github.com/antonprafanto/mobile2026</a:t>
             </a:r>
           </a:p>
         </p:txBody>
@@ -7756,8 +8572,8 @@
         </p:nvSpPr>
         <p:spPr>
           <a:xfrm>
-            <a:off x="1188720" y="2240280"/>
-            <a:ext cx="9784080" cy="3931920"/>
+            <a:off x="1188720" y="2212848"/>
+            <a:ext cx="9784080" cy="3291840"/>
           </a:xfrm>
           <a:prstGeom prst="rect">
             <a:avLst/>
@@ -7772,9 +8588,9 @@
           <a:p>
             <a:pPr>
               <a:spcAft>
-                <a:spcPts val="500"/>
+                <a:spcPts val="400"/>
               </a:spcAft>
-              <a:defRPr sz="1450" b="1">
+              <a:defRPr sz="1350" b="1">
                 <a:solidFill>
                   <a:srgbClr val="000000"/>
                 </a:solidFill>
@@ -7788,9 +8604,9 @@
           <a:p>
             <a:pPr>
               <a:spcAft>
-                <a:spcPts val="300"/>
+                <a:spcPts val="200"/>
               </a:spcAft>
-              <a:defRPr sz="1100">
+              <a:defRPr sz="1050">
                 <a:solidFill>
                   <a:srgbClr val="1E1E1E"/>
                 </a:solidFill>
@@ -7804,9 +8620,9 @@
           <a:p>
             <a:pPr>
               <a:spcAft>
-                <a:spcPts val="300"/>
+                <a:spcPts val="200"/>
               </a:spcAft>
-              <a:defRPr sz="1100">
+              <a:defRPr sz="1050">
                 <a:solidFill>
                   <a:srgbClr val="1E1E1E"/>
                 </a:solidFill>
@@ -7820,9 +8636,9 @@
           <a:p>
             <a:pPr>
               <a:spcAft>
-                <a:spcPts val="300"/>
+                <a:spcPts val="200"/>
               </a:spcAft>
-              <a:defRPr sz="1100">
+              <a:defRPr sz="1050">
                 <a:solidFill>
                   <a:srgbClr val="1E1E1E"/>
                 </a:solidFill>
@@ -7836,9 +8652,9 @@
           <a:p>
             <a:pPr>
               <a:spcAft>
-                <a:spcPts val="300"/>
+                <a:spcPts val="200"/>
               </a:spcAft>
-              <a:defRPr sz="1100">
+              <a:defRPr sz="1050">
                 <a:solidFill>
                   <a:srgbClr val="1E1E1E"/>
                 </a:solidFill>
@@ -7852,9 +8668,9 @@
           <a:p>
             <a:pPr>
               <a:spcAft>
-                <a:spcPts val="300"/>
+                <a:spcPts val="200"/>
               </a:spcAft>
-              <a:defRPr sz="1100">
+              <a:defRPr sz="1050">
                 <a:solidFill>
                   <a:srgbClr val="1E1E1E"/>
                 </a:solidFill>
@@ -7868,9 +8684,9 @@
           <a:p>
             <a:pPr>
               <a:spcAft>
-                <a:spcPts val="300"/>
+                <a:spcPts val="200"/>
               </a:spcAft>
-              <a:defRPr sz="1100">
+              <a:defRPr sz="1050">
                 <a:solidFill>
                   <a:srgbClr val="1E1E1E"/>
                 </a:solidFill>
@@ -7882,9 +8698,8 @@
             </a:r>
           </a:p>
           <a:p>
-            <a:br/>
-            <a:pPr>
-              <a:defRPr sz="1150" b="1">
+            <a:pPr>
+              <a:defRPr sz="1100" b="1">
                 <a:solidFill>
                   <a:srgbClr val="00823C"/>
                 </a:solidFill>
@@ -7892,11 +8707,143 @@
               </a:defRPr>
             </a:pPr>
             <a:r>
-              <a:t>✔ Kriteria Keberhasilan (Tunjukkan ke Dosen/Asisten Lab):</a:t>
-            </a:r>
-            <a:br/>
-            <a:r>
-              <a:t>Tunjukkan hasil eksekusi terminal di DartPad/VS Code kepada Dosen atau Asisten Lab untuk mendapatkan checklist nilai modul 2.</a:t>
+              <a:t>✔ Kriteria Keberhasilan (Tunjukkan ke Dosen/Asisten Lab): Tunjukkan hasil eksekusi terminal di DartPad/VS Code kepada Dosen atau Asisten Lab untuk mendapatkan checklist nilai modul 2.</a:t>
+            </a:r>
+          </a:p>
+        </p:txBody>
+      </p:sp>
+      <p:sp>
+        <p:nvSpPr>
+          <p:cNvPr id="12" name="Rectangle 11"/>
+          <p:cNvSpPr/>
+          <p:nvPr/>
+        </p:nvSpPr>
+        <p:spPr>
+          <a:xfrm>
+            <a:off x="1225296" y="5669280"/>
+            <a:ext cx="9784080" cy="502920"/>
+          </a:xfrm>
+          <a:prstGeom prst="rect">
+            <a:avLst/>
+          </a:prstGeom>
+          <a:solidFill>
+            <a:srgbClr val="000000"/>
+          </a:solidFill>
+          <a:ln>
+            <a:noFill/>
+          </a:ln>
+        </p:spPr>
+        <p:style>
+          <a:lnRef idx="1">
+            <a:schemeClr val="accent1"/>
+          </a:lnRef>
+          <a:fillRef idx="3">
+            <a:schemeClr val="accent1"/>
+          </a:fillRef>
+          <a:effectRef idx="2">
+            <a:schemeClr val="accent1"/>
+          </a:effectRef>
+          <a:fontRef idx="minor">
+            <a:schemeClr val="lt1"/>
+          </a:fontRef>
+        </p:style>
+        <p:txBody>
+          <a:bodyPr rtlCol="0" anchor="ctr"/>
+          <a:lstStyle/>
+          <a:p>
+            <a:pPr algn="ctr"/>
+          </a:p>
+        </p:txBody>
+      </p:sp>
+      <p:sp>
+        <p:nvSpPr>
+          <p:cNvPr id="13" name="Rectangle 12"/>
+          <p:cNvSpPr/>
+          <p:nvPr/>
+        </p:nvSpPr>
+        <p:spPr>
+          <a:xfrm>
+            <a:off x="1188720" y="5632704"/>
+            <a:ext cx="9784080" cy="502920"/>
+          </a:xfrm>
+          <a:prstGeom prst="rect">
+            <a:avLst/>
+          </a:prstGeom>
+          <a:solidFill>
+            <a:srgbClr val="4ADE80"/>
+          </a:solidFill>
+          <a:ln w="25400">
+            <a:solidFill>
+              <a:srgbClr val="000000"/>
+            </a:solidFill>
+          </a:ln>
+        </p:spPr>
+        <p:style>
+          <a:lnRef idx="1">
+            <a:schemeClr val="accent1"/>
+          </a:lnRef>
+          <a:fillRef idx="3">
+            <a:schemeClr val="accent1"/>
+          </a:fillRef>
+          <a:effectRef idx="2">
+            <a:schemeClr val="accent1"/>
+          </a:effectRef>
+          <a:fontRef idx="minor">
+            <a:schemeClr val="lt1"/>
+          </a:fontRef>
+        </p:style>
+        <p:txBody>
+          <a:bodyPr rtlCol="0" anchor="ctr"/>
+          <a:lstStyle/>
+          <a:p>
+            <a:pPr algn="ctr"/>
+          </a:p>
+        </p:txBody>
+      </p:sp>
+      <p:sp>
+        <p:nvSpPr>
+          <p:cNvPr id="14" name="TextBox 13"/>
+          <p:cNvSpPr txBox="1"/>
+          <p:nvPr/>
+        </p:nvSpPr>
+        <p:spPr>
+          <a:xfrm>
+            <a:off x="1261872" y="5660136"/>
+            <a:ext cx="9637776" cy="448056"/>
+          </a:xfrm>
+          <a:prstGeom prst="rect">
+            <a:avLst/>
+          </a:prstGeom>
+          <a:noFill/>
+        </p:spPr>
+        <p:txBody>
+          <a:bodyPr wrap="square">
+            <a:spAutoFit/>
+          </a:bodyPr>
+          <a:lstStyle/>
+          <a:p>
+            <a:r>
+              <a:rPr sz="1000" b="1">
+                <a:solidFill>
+                  <a:srgbClr val="000000"/>
+                </a:solidFill>
+                <a:latin typeface="Segoe UI"/>
+                <a:hlinkClick r:id="rId2"/>
+              </a:rPr>
+              <a:t>▶ BUKA KODE SOLUSI LENGKAP LAB QUEST DI GITHUB (slide_16_lab_quest_tugas_02.dart)</a:t>
+            </a:r>
+          </a:p>
+          <a:p>
+            <a:pPr>
+              <a:defRPr sz="800">
+                <a:solidFill>
+                  <a:srgbClr val="3C3C3C"/>
+                </a:solidFill>
+                <a:latin typeface="Segoe UI"/>
+              </a:defRPr>
+            </a:pPr>
+            <a:r>
+              <a:t>💡 Buka di browser / salin source code: github.com/antonprafanto/mobile2026</a:t>
             </a:r>
           </a:p>
         </p:txBody>
@@ -8487,8 +9434,8 @@
         </p:nvSpPr>
         <p:spPr>
           <a:xfrm>
-            <a:off x="5669280" y="2176272"/>
-            <a:ext cx="5486400" cy="3977639"/>
+            <a:off x="5669280" y="2121408"/>
+            <a:ext cx="5486400" cy="3364992"/>
           </a:xfrm>
           <a:prstGeom prst="rect">
             <a:avLst/>
@@ -8502,7 +9449,7 @@
           <a:lstStyle/>
           <a:p>
             <a:pPr>
-              <a:defRPr sz="980">
+              <a:defRPr sz="919">
                 <a:solidFill>
                   <a:srgbClr val="F5F5F5"/>
                 </a:solidFill>
@@ -8541,6 +9488,142 @@
             <a:br/>
             <a:r>
               <a:t>// $ dart run latihan.dart</a:t>
+            </a:r>
+          </a:p>
+        </p:txBody>
+      </p:sp>
+      <p:sp>
+        <p:nvSpPr>
+          <p:cNvPr id="15" name="Rectangle 14"/>
+          <p:cNvSpPr/>
+          <p:nvPr/>
+        </p:nvSpPr>
+        <p:spPr>
+          <a:xfrm>
+            <a:off x="5660136" y="5669280"/>
+            <a:ext cx="5608015" cy="548640"/>
+          </a:xfrm>
+          <a:prstGeom prst="rect">
+            <a:avLst/>
+          </a:prstGeom>
+          <a:solidFill>
+            <a:srgbClr val="000000"/>
+          </a:solidFill>
+          <a:ln>
+            <a:noFill/>
+          </a:ln>
+        </p:spPr>
+        <p:style>
+          <a:lnRef idx="1">
+            <a:schemeClr val="accent1"/>
+          </a:lnRef>
+          <a:fillRef idx="3">
+            <a:schemeClr val="accent1"/>
+          </a:fillRef>
+          <a:effectRef idx="2">
+            <a:schemeClr val="accent1"/>
+          </a:effectRef>
+          <a:fontRef idx="minor">
+            <a:schemeClr val="lt1"/>
+          </a:fontRef>
+        </p:style>
+        <p:txBody>
+          <a:bodyPr rtlCol="0" anchor="ctr"/>
+          <a:lstStyle/>
+          <a:p>
+            <a:pPr algn="ctr"/>
+          </a:p>
+        </p:txBody>
+      </p:sp>
+      <p:sp>
+        <p:nvSpPr>
+          <p:cNvPr id="16" name="Rectangle 15"/>
+          <p:cNvSpPr/>
+          <p:nvPr/>
+        </p:nvSpPr>
+        <p:spPr>
+          <a:xfrm>
+            <a:off x="5623560" y="5632704"/>
+            <a:ext cx="5608015" cy="548640"/>
+          </a:xfrm>
+          <a:prstGeom prst="rect">
+            <a:avLst/>
+          </a:prstGeom>
+          <a:solidFill>
+            <a:srgbClr val="FFE600"/>
+          </a:solidFill>
+          <a:ln w="25400">
+            <a:solidFill>
+              <a:srgbClr val="000000"/>
+            </a:solidFill>
+          </a:ln>
+        </p:spPr>
+        <p:style>
+          <a:lnRef idx="1">
+            <a:schemeClr val="accent1"/>
+          </a:lnRef>
+          <a:fillRef idx="3">
+            <a:schemeClr val="accent1"/>
+          </a:fillRef>
+          <a:effectRef idx="2">
+            <a:schemeClr val="accent1"/>
+          </a:effectRef>
+          <a:fontRef idx="minor">
+            <a:schemeClr val="lt1"/>
+          </a:fontRef>
+        </p:style>
+        <p:txBody>
+          <a:bodyPr rtlCol="0" anchor="ctr"/>
+          <a:lstStyle/>
+          <a:p>
+            <a:pPr algn="ctr"/>
+          </a:p>
+        </p:txBody>
+      </p:sp>
+      <p:sp>
+        <p:nvSpPr>
+          <p:cNvPr id="17" name="TextBox 16"/>
+          <p:cNvSpPr txBox="1"/>
+          <p:nvPr/>
+        </p:nvSpPr>
+        <p:spPr>
+          <a:xfrm>
+            <a:off x="5696712" y="5660136"/>
+            <a:ext cx="5461711" cy="493776"/>
+          </a:xfrm>
+          <a:prstGeom prst="rect">
+            <a:avLst/>
+          </a:prstGeom>
+          <a:noFill/>
+        </p:spPr>
+        <p:txBody>
+          <a:bodyPr wrap="square">
+            <a:spAutoFit/>
+          </a:bodyPr>
+          <a:lstStyle/>
+          <a:p>
+            <a:r>
+              <a:rPr sz="960" b="1">
+                <a:solidFill>
+                  <a:srgbClr val="000000"/>
+                </a:solidFill>
+                <a:latin typeface="Segoe UI"/>
+                <a:hlinkClick r:id="rId2"/>
+              </a:rPr>
+              <a:t>▶ BUKA KODE LENGKAP DI GITHUB (slide_02_tools_dan_environment.dart)</a:t>
+            </a:r>
+          </a:p>
+          <a:p>
+            <a:pPr>
+              <a:defRPr sz="760">
+                <a:solidFill>
+                  <a:srgbClr val="3C3C3C"/>
+                </a:solidFill>
+                <a:latin typeface="Segoe UI"/>
+              </a:defRPr>
+            </a:pPr>
+            <a:r>
+              <a:t>💡 Buka di browser / salin source code: github.com/antonprafanto/mobile2026</a:t>
             </a:r>
           </a:p>
         </p:txBody>
@@ -9147,8 +10230,8 @@
         </p:nvSpPr>
         <p:spPr>
           <a:xfrm>
-            <a:off x="5669280" y="2176272"/>
-            <a:ext cx="5486400" cy="3977639"/>
+            <a:off x="5669280" y="2121408"/>
+            <a:ext cx="5486400" cy="3364992"/>
           </a:xfrm>
           <a:prstGeom prst="rect">
             <a:avLst/>
@@ -9162,7 +10245,7 @@
           <a:lstStyle/>
           <a:p>
             <a:pPr>
-              <a:defRPr sz="980">
+              <a:defRPr sz="919">
                 <a:solidFill>
                   <a:srgbClr val="F5F5F5"/>
                 </a:solidFill>
@@ -9207,6 +10290,142 @@
             <a:br/>
             <a:r>
               <a:t>}</a:t>
+            </a:r>
+          </a:p>
+        </p:txBody>
+      </p:sp>
+      <p:sp>
+        <p:nvSpPr>
+          <p:cNvPr id="15" name="Rectangle 14"/>
+          <p:cNvSpPr/>
+          <p:nvPr/>
+        </p:nvSpPr>
+        <p:spPr>
+          <a:xfrm>
+            <a:off x="5660136" y="5669280"/>
+            <a:ext cx="5608015" cy="548640"/>
+          </a:xfrm>
+          <a:prstGeom prst="rect">
+            <a:avLst/>
+          </a:prstGeom>
+          <a:solidFill>
+            <a:srgbClr val="000000"/>
+          </a:solidFill>
+          <a:ln>
+            <a:noFill/>
+          </a:ln>
+        </p:spPr>
+        <p:style>
+          <a:lnRef idx="1">
+            <a:schemeClr val="accent1"/>
+          </a:lnRef>
+          <a:fillRef idx="3">
+            <a:schemeClr val="accent1"/>
+          </a:fillRef>
+          <a:effectRef idx="2">
+            <a:schemeClr val="accent1"/>
+          </a:effectRef>
+          <a:fontRef idx="minor">
+            <a:schemeClr val="lt1"/>
+          </a:fontRef>
+        </p:style>
+        <p:txBody>
+          <a:bodyPr rtlCol="0" anchor="ctr"/>
+          <a:lstStyle/>
+          <a:p>
+            <a:pPr algn="ctr"/>
+          </a:p>
+        </p:txBody>
+      </p:sp>
+      <p:sp>
+        <p:nvSpPr>
+          <p:cNvPr id="16" name="Rectangle 15"/>
+          <p:cNvSpPr/>
+          <p:nvPr/>
+        </p:nvSpPr>
+        <p:spPr>
+          <a:xfrm>
+            <a:off x="5623560" y="5632704"/>
+            <a:ext cx="5608015" cy="548640"/>
+          </a:xfrm>
+          <a:prstGeom prst="rect">
+            <a:avLst/>
+          </a:prstGeom>
+          <a:solidFill>
+            <a:srgbClr val="FFE600"/>
+          </a:solidFill>
+          <a:ln w="25400">
+            <a:solidFill>
+              <a:srgbClr val="000000"/>
+            </a:solidFill>
+          </a:ln>
+        </p:spPr>
+        <p:style>
+          <a:lnRef idx="1">
+            <a:schemeClr val="accent1"/>
+          </a:lnRef>
+          <a:fillRef idx="3">
+            <a:schemeClr val="accent1"/>
+          </a:fillRef>
+          <a:effectRef idx="2">
+            <a:schemeClr val="accent1"/>
+          </a:effectRef>
+          <a:fontRef idx="minor">
+            <a:schemeClr val="lt1"/>
+          </a:fontRef>
+        </p:style>
+        <p:txBody>
+          <a:bodyPr rtlCol="0" anchor="ctr"/>
+          <a:lstStyle/>
+          <a:p>
+            <a:pPr algn="ctr"/>
+          </a:p>
+        </p:txBody>
+      </p:sp>
+      <p:sp>
+        <p:nvSpPr>
+          <p:cNvPr id="17" name="TextBox 16"/>
+          <p:cNvSpPr txBox="1"/>
+          <p:nvPr/>
+        </p:nvSpPr>
+        <p:spPr>
+          <a:xfrm>
+            <a:off x="5696712" y="5660136"/>
+            <a:ext cx="5461711" cy="493776"/>
+          </a:xfrm>
+          <a:prstGeom prst="rect">
+            <a:avLst/>
+          </a:prstGeom>
+          <a:noFill/>
+        </p:spPr>
+        <p:txBody>
+          <a:bodyPr wrap="square">
+            <a:spAutoFit/>
+          </a:bodyPr>
+          <a:lstStyle/>
+          <a:p>
+            <a:r>
+              <a:rPr sz="960" b="1">
+                <a:solidFill>
+                  <a:srgbClr val="000000"/>
+                </a:solidFill>
+                <a:latin typeface="Segoe UI"/>
+                <a:hlinkClick r:id="rId2"/>
+              </a:rPr>
+              <a:t>▶ BUKA KODE LENGKAP DI GITHUB (slide_03_mindset_dart_logika.dart)</a:t>
+            </a:r>
+          </a:p>
+          <a:p>
+            <a:pPr>
+              <a:defRPr sz="760">
+                <a:solidFill>
+                  <a:srgbClr val="3C3C3C"/>
+                </a:solidFill>
+                <a:latin typeface="Segoe UI"/>
+              </a:defRPr>
+            </a:pPr>
+            <a:r>
+              <a:t>💡 Buka di browser / salin source code: github.com/antonprafanto/mobile2026</a:t>
             </a:r>
           </a:p>
         </p:txBody>
@@ -9829,8 +11048,8 @@
         </p:nvSpPr>
         <p:spPr>
           <a:xfrm>
-            <a:off x="5669280" y="2176272"/>
-            <a:ext cx="5486400" cy="3977639"/>
+            <a:off x="5669280" y="2121408"/>
+            <a:ext cx="5486400" cy="3364992"/>
           </a:xfrm>
           <a:prstGeom prst="rect">
             <a:avLst/>
@@ -9844,7 +11063,7 @@
           <a:lstStyle/>
           <a:p>
             <a:pPr>
-              <a:defRPr sz="980">
+              <a:defRPr sz="919">
                 <a:solidFill>
                   <a:srgbClr val="F5F5F5"/>
                 </a:solidFill>
@@ -9891,6 +11110,142 @@
             <a:br/>
             <a:r>
               <a:t>}</a:t>
+            </a:r>
+          </a:p>
+        </p:txBody>
+      </p:sp>
+      <p:sp>
+        <p:nvSpPr>
+          <p:cNvPr id="15" name="Rectangle 14"/>
+          <p:cNvSpPr/>
+          <p:nvPr/>
+        </p:nvSpPr>
+        <p:spPr>
+          <a:xfrm>
+            <a:off x="5660136" y="5669280"/>
+            <a:ext cx="5608015" cy="548640"/>
+          </a:xfrm>
+          <a:prstGeom prst="rect">
+            <a:avLst/>
+          </a:prstGeom>
+          <a:solidFill>
+            <a:srgbClr val="000000"/>
+          </a:solidFill>
+          <a:ln>
+            <a:noFill/>
+          </a:ln>
+        </p:spPr>
+        <p:style>
+          <a:lnRef idx="1">
+            <a:schemeClr val="accent1"/>
+          </a:lnRef>
+          <a:fillRef idx="3">
+            <a:schemeClr val="accent1"/>
+          </a:fillRef>
+          <a:effectRef idx="2">
+            <a:schemeClr val="accent1"/>
+          </a:effectRef>
+          <a:fontRef idx="minor">
+            <a:schemeClr val="lt1"/>
+          </a:fontRef>
+        </p:style>
+        <p:txBody>
+          <a:bodyPr rtlCol="0" anchor="ctr"/>
+          <a:lstStyle/>
+          <a:p>
+            <a:pPr algn="ctr"/>
+          </a:p>
+        </p:txBody>
+      </p:sp>
+      <p:sp>
+        <p:nvSpPr>
+          <p:cNvPr id="16" name="Rectangle 15"/>
+          <p:cNvSpPr/>
+          <p:nvPr/>
+        </p:nvSpPr>
+        <p:spPr>
+          <a:xfrm>
+            <a:off x="5623560" y="5632704"/>
+            <a:ext cx="5608015" cy="548640"/>
+          </a:xfrm>
+          <a:prstGeom prst="rect">
+            <a:avLst/>
+          </a:prstGeom>
+          <a:solidFill>
+            <a:srgbClr val="FFE600"/>
+          </a:solidFill>
+          <a:ln w="25400">
+            <a:solidFill>
+              <a:srgbClr val="000000"/>
+            </a:solidFill>
+          </a:ln>
+        </p:spPr>
+        <p:style>
+          <a:lnRef idx="1">
+            <a:schemeClr val="accent1"/>
+          </a:lnRef>
+          <a:fillRef idx="3">
+            <a:schemeClr val="accent1"/>
+          </a:fillRef>
+          <a:effectRef idx="2">
+            <a:schemeClr val="accent1"/>
+          </a:effectRef>
+          <a:fontRef idx="minor">
+            <a:schemeClr val="lt1"/>
+          </a:fontRef>
+        </p:style>
+        <p:txBody>
+          <a:bodyPr rtlCol="0" anchor="ctr"/>
+          <a:lstStyle/>
+          <a:p>
+            <a:pPr algn="ctr"/>
+          </a:p>
+        </p:txBody>
+      </p:sp>
+      <p:sp>
+        <p:nvSpPr>
+          <p:cNvPr id="17" name="TextBox 16"/>
+          <p:cNvSpPr txBox="1"/>
+          <p:nvPr/>
+        </p:nvSpPr>
+        <p:spPr>
+          <a:xfrm>
+            <a:off x="5696712" y="5660136"/>
+            <a:ext cx="5461711" cy="493776"/>
+          </a:xfrm>
+          <a:prstGeom prst="rect">
+            <a:avLst/>
+          </a:prstGeom>
+          <a:noFill/>
+        </p:spPr>
+        <p:txBody>
+          <a:bodyPr wrap="square">
+            <a:spAutoFit/>
+          </a:bodyPr>
+          <a:lstStyle/>
+          <a:p>
+            <a:r>
+              <a:rPr sz="960" b="1">
+                <a:solidFill>
+                  <a:srgbClr val="000000"/>
+                </a:solidFill>
+                <a:latin typeface="Segoe UI"/>
+                <a:hlinkClick r:id="rId2"/>
+              </a:rPr>
+              <a:t>▶ BUKA KODE LENGKAP DI GITHUB (slide_04_variabel_dan_tipe_data.dart)</a:t>
+            </a:r>
+          </a:p>
+          <a:p>
+            <a:pPr>
+              <a:defRPr sz="760">
+                <a:solidFill>
+                  <a:srgbClr val="3C3C3C"/>
+                </a:solidFill>
+                <a:latin typeface="Segoe UI"/>
+              </a:defRPr>
+            </a:pPr>
+            <a:r>
+              <a:t>💡 Buka di browser / salin source code: github.com/antonprafanto/mobile2026</a:t>
             </a:r>
           </a:p>
         </p:txBody>
@@ -10497,8 +11852,8 @@
         </p:nvSpPr>
         <p:spPr>
           <a:xfrm>
-            <a:off x="5669280" y="2176272"/>
-            <a:ext cx="5486400" cy="3977639"/>
+            <a:off x="5669280" y="2121408"/>
+            <a:ext cx="5486400" cy="3364992"/>
           </a:xfrm>
           <a:prstGeom prst="rect">
             <a:avLst/>
@@ -10512,7 +11867,7 @@
           <a:lstStyle/>
           <a:p>
             <a:pPr>
-              <a:defRPr sz="980">
+              <a:defRPr sz="919">
                 <a:solidFill>
                   <a:srgbClr val="F5F5F5"/>
                 </a:solidFill>
@@ -10559,6 +11914,142 @@
             <a:br/>
             <a:r>
               <a:t>}</a:t>
+            </a:r>
+          </a:p>
+        </p:txBody>
+      </p:sp>
+      <p:sp>
+        <p:nvSpPr>
+          <p:cNvPr id="15" name="Rectangle 14"/>
+          <p:cNvSpPr/>
+          <p:nvPr/>
+        </p:nvSpPr>
+        <p:spPr>
+          <a:xfrm>
+            <a:off x="5660136" y="5669280"/>
+            <a:ext cx="5608015" cy="548640"/>
+          </a:xfrm>
+          <a:prstGeom prst="rect">
+            <a:avLst/>
+          </a:prstGeom>
+          <a:solidFill>
+            <a:srgbClr val="000000"/>
+          </a:solidFill>
+          <a:ln>
+            <a:noFill/>
+          </a:ln>
+        </p:spPr>
+        <p:style>
+          <a:lnRef idx="1">
+            <a:schemeClr val="accent1"/>
+          </a:lnRef>
+          <a:fillRef idx="3">
+            <a:schemeClr val="accent1"/>
+          </a:fillRef>
+          <a:effectRef idx="2">
+            <a:schemeClr val="accent1"/>
+          </a:effectRef>
+          <a:fontRef idx="minor">
+            <a:schemeClr val="lt1"/>
+          </a:fontRef>
+        </p:style>
+        <p:txBody>
+          <a:bodyPr rtlCol="0" anchor="ctr"/>
+          <a:lstStyle/>
+          <a:p>
+            <a:pPr algn="ctr"/>
+          </a:p>
+        </p:txBody>
+      </p:sp>
+      <p:sp>
+        <p:nvSpPr>
+          <p:cNvPr id="16" name="Rectangle 15"/>
+          <p:cNvSpPr/>
+          <p:nvPr/>
+        </p:nvSpPr>
+        <p:spPr>
+          <a:xfrm>
+            <a:off x="5623560" y="5632704"/>
+            <a:ext cx="5608015" cy="548640"/>
+          </a:xfrm>
+          <a:prstGeom prst="rect">
+            <a:avLst/>
+          </a:prstGeom>
+          <a:solidFill>
+            <a:srgbClr val="FFE600"/>
+          </a:solidFill>
+          <a:ln w="25400">
+            <a:solidFill>
+              <a:srgbClr val="000000"/>
+            </a:solidFill>
+          </a:ln>
+        </p:spPr>
+        <p:style>
+          <a:lnRef idx="1">
+            <a:schemeClr val="accent1"/>
+          </a:lnRef>
+          <a:fillRef idx="3">
+            <a:schemeClr val="accent1"/>
+          </a:fillRef>
+          <a:effectRef idx="2">
+            <a:schemeClr val="accent1"/>
+          </a:effectRef>
+          <a:fontRef idx="minor">
+            <a:schemeClr val="lt1"/>
+          </a:fontRef>
+        </p:style>
+        <p:txBody>
+          <a:bodyPr rtlCol="0" anchor="ctr"/>
+          <a:lstStyle/>
+          <a:p>
+            <a:pPr algn="ctr"/>
+          </a:p>
+        </p:txBody>
+      </p:sp>
+      <p:sp>
+        <p:nvSpPr>
+          <p:cNvPr id="17" name="TextBox 16"/>
+          <p:cNvSpPr txBox="1"/>
+          <p:nvPr/>
+        </p:nvSpPr>
+        <p:spPr>
+          <a:xfrm>
+            <a:off x="5696712" y="5660136"/>
+            <a:ext cx="5461711" cy="493776"/>
+          </a:xfrm>
+          <a:prstGeom prst="rect">
+            <a:avLst/>
+          </a:prstGeom>
+          <a:noFill/>
+        </p:spPr>
+        <p:txBody>
+          <a:bodyPr wrap="square">
+            <a:spAutoFit/>
+          </a:bodyPr>
+          <a:lstStyle/>
+          <a:p>
+            <a:r>
+              <a:rPr sz="960" b="1">
+                <a:solidFill>
+                  <a:srgbClr val="000000"/>
+                </a:solidFill>
+                <a:latin typeface="Segoe UI"/>
+                <a:hlinkClick r:id="rId2"/>
+              </a:rPr>
+              <a:t>▶ BUKA KODE LENGKAP DI GITHUB (slide_05_sound_null_safety.dart)</a:t>
+            </a:r>
+          </a:p>
+          <a:p>
+            <a:pPr>
+              <a:defRPr sz="760">
+                <a:solidFill>
+                  <a:srgbClr val="3C3C3C"/>
+                </a:solidFill>
+                <a:latin typeface="Segoe UI"/>
+              </a:defRPr>
+            </a:pPr>
+            <a:r>
+              <a:t>💡 Buka di browser / salin source code: github.com/antonprafanto/mobile2026</a:t>
             </a:r>
           </a:p>
         </p:txBody>
@@ -11165,8 +12656,8 @@
         </p:nvSpPr>
         <p:spPr>
           <a:xfrm>
-            <a:off x="5669280" y="2176272"/>
-            <a:ext cx="5486400" cy="3977639"/>
+            <a:off x="5669280" y="2121408"/>
+            <a:ext cx="5486400" cy="3364992"/>
           </a:xfrm>
           <a:prstGeom prst="rect">
             <a:avLst/>
@@ -11180,7 +12671,7 @@
           <a:lstStyle/>
           <a:p>
             <a:pPr>
-              <a:defRPr sz="980">
+              <a:defRPr sz="919">
                 <a:solidFill>
                   <a:srgbClr val="F5F5F5"/>
                 </a:solidFill>
@@ -11236,6 +12727,142 @@
             <a:br/>
             <a:r>
               <a:t>}</a:t>
+            </a:r>
+          </a:p>
+        </p:txBody>
+      </p:sp>
+      <p:sp>
+        <p:nvSpPr>
+          <p:cNvPr id="15" name="Rectangle 14"/>
+          <p:cNvSpPr/>
+          <p:nvPr/>
+        </p:nvSpPr>
+        <p:spPr>
+          <a:xfrm>
+            <a:off x="5660136" y="5669280"/>
+            <a:ext cx="5608015" cy="548640"/>
+          </a:xfrm>
+          <a:prstGeom prst="rect">
+            <a:avLst/>
+          </a:prstGeom>
+          <a:solidFill>
+            <a:srgbClr val="000000"/>
+          </a:solidFill>
+          <a:ln>
+            <a:noFill/>
+          </a:ln>
+        </p:spPr>
+        <p:style>
+          <a:lnRef idx="1">
+            <a:schemeClr val="accent1"/>
+          </a:lnRef>
+          <a:fillRef idx="3">
+            <a:schemeClr val="accent1"/>
+          </a:fillRef>
+          <a:effectRef idx="2">
+            <a:schemeClr val="accent1"/>
+          </a:effectRef>
+          <a:fontRef idx="minor">
+            <a:schemeClr val="lt1"/>
+          </a:fontRef>
+        </p:style>
+        <p:txBody>
+          <a:bodyPr rtlCol="0" anchor="ctr"/>
+          <a:lstStyle/>
+          <a:p>
+            <a:pPr algn="ctr"/>
+          </a:p>
+        </p:txBody>
+      </p:sp>
+      <p:sp>
+        <p:nvSpPr>
+          <p:cNvPr id="16" name="Rectangle 15"/>
+          <p:cNvSpPr/>
+          <p:nvPr/>
+        </p:nvSpPr>
+        <p:spPr>
+          <a:xfrm>
+            <a:off x="5623560" y="5632704"/>
+            <a:ext cx="5608015" cy="548640"/>
+          </a:xfrm>
+          <a:prstGeom prst="rect">
+            <a:avLst/>
+          </a:prstGeom>
+          <a:solidFill>
+            <a:srgbClr val="FFE600"/>
+          </a:solidFill>
+          <a:ln w="25400">
+            <a:solidFill>
+              <a:srgbClr val="000000"/>
+            </a:solidFill>
+          </a:ln>
+        </p:spPr>
+        <p:style>
+          <a:lnRef idx="1">
+            <a:schemeClr val="accent1"/>
+          </a:lnRef>
+          <a:fillRef idx="3">
+            <a:schemeClr val="accent1"/>
+          </a:fillRef>
+          <a:effectRef idx="2">
+            <a:schemeClr val="accent1"/>
+          </a:effectRef>
+          <a:fontRef idx="minor">
+            <a:schemeClr val="lt1"/>
+          </a:fontRef>
+        </p:style>
+        <p:txBody>
+          <a:bodyPr rtlCol="0" anchor="ctr"/>
+          <a:lstStyle/>
+          <a:p>
+            <a:pPr algn="ctr"/>
+          </a:p>
+        </p:txBody>
+      </p:sp>
+      <p:sp>
+        <p:nvSpPr>
+          <p:cNvPr id="17" name="TextBox 16"/>
+          <p:cNvSpPr txBox="1"/>
+          <p:nvPr/>
+        </p:nvSpPr>
+        <p:spPr>
+          <a:xfrm>
+            <a:off x="5696712" y="5660136"/>
+            <a:ext cx="5461711" cy="493776"/>
+          </a:xfrm>
+          <a:prstGeom prst="rect">
+            <a:avLst/>
+          </a:prstGeom>
+          <a:noFill/>
+        </p:spPr>
+        <p:txBody>
+          <a:bodyPr wrap="square">
+            <a:spAutoFit/>
+          </a:bodyPr>
+          <a:lstStyle/>
+          <a:p>
+            <a:r>
+              <a:rPr sz="960" b="1">
+                <a:solidFill>
+                  <a:srgbClr val="000000"/>
+                </a:solidFill>
+                <a:latin typeface="Segoe UI"/>
+                <a:hlinkClick r:id="rId2"/>
+              </a:rPr>
+              <a:t>▶ BUKA KODE LENGKAP DI GITHUB (slide_06_operator_penjinak_null.dart)</a:t>
+            </a:r>
+          </a:p>
+          <a:p>
+            <a:pPr>
+              <a:defRPr sz="760">
+                <a:solidFill>
+                  <a:srgbClr val="3C3C3C"/>
+                </a:solidFill>
+                <a:latin typeface="Segoe UI"/>
+              </a:defRPr>
+            </a:pPr>
+            <a:r>
+              <a:t>💡 Buka di browser / salin source code: github.com/antonprafanto/mobile2026</a:t>
             </a:r>
           </a:p>
         </p:txBody>
@@ -11842,8 +13469,8 @@
         </p:nvSpPr>
         <p:spPr>
           <a:xfrm>
-            <a:off x="5669280" y="2176272"/>
-            <a:ext cx="5486400" cy="3977639"/>
+            <a:off x="5669280" y="2121408"/>
+            <a:ext cx="5486400" cy="3364992"/>
           </a:xfrm>
           <a:prstGeom prst="rect">
             <a:avLst/>
@@ -11857,7 +13484,7 @@
           <a:lstStyle/>
           <a:p>
             <a:pPr>
-              <a:defRPr sz="980">
+              <a:defRPr sz="919">
                 <a:solidFill>
                   <a:srgbClr val="F5F5F5"/>
                 </a:solidFill>
@@ -11896,6 +13523,142 @@
             <a:br/>
             <a:r>
               <a:t>void main() =&gt; print('Hasil 10 x 2 = ${kaliDua(10)}');</a:t>
+            </a:r>
+          </a:p>
+        </p:txBody>
+      </p:sp>
+      <p:sp>
+        <p:nvSpPr>
+          <p:cNvPr id="15" name="Rectangle 14"/>
+          <p:cNvSpPr/>
+          <p:nvPr/>
+        </p:nvSpPr>
+        <p:spPr>
+          <a:xfrm>
+            <a:off x="5660136" y="5669280"/>
+            <a:ext cx="5608015" cy="548640"/>
+          </a:xfrm>
+          <a:prstGeom prst="rect">
+            <a:avLst/>
+          </a:prstGeom>
+          <a:solidFill>
+            <a:srgbClr val="000000"/>
+          </a:solidFill>
+          <a:ln>
+            <a:noFill/>
+          </a:ln>
+        </p:spPr>
+        <p:style>
+          <a:lnRef idx="1">
+            <a:schemeClr val="accent1"/>
+          </a:lnRef>
+          <a:fillRef idx="3">
+            <a:schemeClr val="accent1"/>
+          </a:fillRef>
+          <a:effectRef idx="2">
+            <a:schemeClr val="accent1"/>
+          </a:effectRef>
+          <a:fontRef idx="minor">
+            <a:schemeClr val="lt1"/>
+          </a:fontRef>
+        </p:style>
+        <p:txBody>
+          <a:bodyPr rtlCol="0" anchor="ctr"/>
+          <a:lstStyle/>
+          <a:p>
+            <a:pPr algn="ctr"/>
+          </a:p>
+        </p:txBody>
+      </p:sp>
+      <p:sp>
+        <p:nvSpPr>
+          <p:cNvPr id="16" name="Rectangle 15"/>
+          <p:cNvSpPr/>
+          <p:nvPr/>
+        </p:nvSpPr>
+        <p:spPr>
+          <a:xfrm>
+            <a:off x="5623560" y="5632704"/>
+            <a:ext cx="5608015" cy="548640"/>
+          </a:xfrm>
+          <a:prstGeom prst="rect">
+            <a:avLst/>
+          </a:prstGeom>
+          <a:solidFill>
+            <a:srgbClr val="FFE600"/>
+          </a:solidFill>
+          <a:ln w="25400">
+            <a:solidFill>
+              <a:srgbClr val="000000"/>
+            </a:solidFill>
+          </a:ln>
+        </p:spPr>
+        <p:style>
+          <a:lnRef idx="1">
+            <a:schemeClr val="accent1"/>
+          </a:lnRef>
+          <a:fillRef idx="3">
+            <a:schemeClr val="accent1"/>
+          </a:fillRef>
+          <a:effectRef idx="2">
+            <a:schemeClr val="accent1"/>
+          </a:effectRef>
+          <a:fontRef idx="minor">
+            <a:schemeClr val="lt1"/>
+          </a:fontRef>
+        </p:style>
+        <p:txBody>
+          <a:bodyPr rtlCol="0" anchor="ctr"/>
+          <a:lstStyle/>
+          <a:p>
+            <a:pPr algn="ctr"/>
+          </a:p>
+        </p:txBody>
+      </p:sp>
+      <p:sp>
+        <p:nvSpPr>
+          <p:cNvPr id="17" name="TextBox 16"/>
+          <p:cNvSpPr txBox="1"/>
+          <p:nvPr/>
+        </p:nvSpPr>
+        <p:spPr>
+          <a:xfrm>
+            <a:off x="5696712" y="5660136"/>
+            <a:ext cx="5461711" cy="493776"/>
+          </a:xfrm>
+          <a:prstGeom prst="rect">
+            <a:avLst/>
+          </a:prstGeom>
+          <a:noFill/>
+        </p:spPr>
+        <p:txBody>
+          <a:bodyPr wrap="square">
+            <a:spAutoFit/>
+          </a:bodyPr>
+          <a:lstStyle/>
+          <a:p>
+            <a:r>
+              <a:rPr sz="960" b="1">
+                <a:solidFill>
+                  <a:srgbClr val="000000"/>
+                </a:solidFill>
+                <a:latin typeface="Segoe UI"/>
+                <a:hlinkClick r:id="rId2"/>
+              </a:rPr>
+              <a:t>▶ BUKA KODE LENGKAP DI GITHUB (slide_07_fat_arrow_functions.dart)</a:t>
+            </a:r>
+          </a:p>
+          <a:p>
+            <a:pPr>
+              <a:defRPr sz="760">
+                <a:solidFill>
+                  <a:srgbClr val="3C3C3C"/>
+                </a:solidFill>
+                <a:latin typeface="Segoe UI"/>
+              </a:defRPr>
+            </a:pPr>
+            <a:r>
+              <a:t>💡 Buka di browser / salin source code: github.com/antonprafanto/mobile2026</a:t>
             </a:r>
           </a:p>
         </p:txBody>
@@ -12502,8 +14265,8 @@
         </p:nvSpPr>
         <p:spPr>
           <a:xfrm>
-            <a:off x="5669280" y="2176272"/>
-            <a:ext cx="5486400" cy="3977639"/>
+            <a:off x="5669280" y="2121408"/>
+            <a:ext cx="5486400" cy="3364992"/>
           </a:xfrm>
           <a:prstGeom prst="rect">
             <a:avLst/>
@@ -12517,7 +14280,7 @@
           <a:lstStyle/>
           <a:p>
             <a:pPr>
-              <a:defRPr sz="980">
+              <a:defRPr sz="919">
                 <a:solidFill>
                   <a:srgbClr val="F5F5F5"/>
                 </a:solidFill>
@@ -12588,6 +14351,142 @@
             <a:br/>
             <a:r>
               <a:t>}</a:t>
+            </a:r>
+          </a:p>
+        </p:txBody>
+      </p:sp>
+      <p:sp>
+        <p:nvSpPr>
+          <p:cNvPr id="15" name="Rectangle 14"/>
+          <p:cNvSpPr/>
+          <p:nvPr/>
+        </p:nvSpPr>
+        <p:spPr>
+          <a:xfrm>
+            <a:off x="5660136" y="5669280"/>
+            <a:ext cx="5608015" cy="548640"/>
+          </a:xfrm>
+          <a:prstGeom prst="rect">
+            <a:avLst/>
+          </a:prstGeom>
+          <a:solidFill>
+            <a:srgbClr val="000000"/>
+          </a:solidFill>
+          <a:ln>
+            <a:noFill/>
+          </a:ln>
+        </p:spPr>
+        <p:style>
+          <a:lnRef idx="1">
+            <a:schemeClr val="accent1"/>
+          </a:lnRef>
+          <a:fillRef idx="3">
+            <a:schemeClr val="accent1"/>
+          </a:fillRef>
+          <a:effectRef idx="2">
+            <a:schemeClr val="accent1"/>
+          </a:effectRef>
+          <a:fontRef idx="minor">
+            <a:schemeClr val="lt1"/>
+          </a:fontRef>
+        </p:style>
+        <p:txBody>
+          <a:bodyPr rtlCol="0" anchor="ctr"/>
+          <a:lstStyle/>
+          <a:p>
+            <a:pPr algn="ctr"/>
+          </a:p>
+        </p:txBody>
+      </p:sp>
+      <p:sp>
+        <p:nvSpPr>
+          <p:cNvPr id="16" name="Rectangle 15"/>
+          <p:cNvSpPr/>
+          <p:nvPr/>
+        </p:nvSpPr>
+        <p:spPr>
+          <a:xfrm>
+            <a:off x="5623560" y="5632704"/>
+            <a:ext cx="5608015" cy="548640"/>
+          </a:xfrm>
+          <a:prstGeom prst="rect">
+            <a:avLst/>
+          </a:prstGeom>
+          <a:solidFill>
+            <a:srgbClr val="FFE600"/>
+          </a:solidFill>
+          <a:ln w="25400">
+            <a:solidFill>
+              <a:srgbClr val="000000"/>
+            </a:solidFill>
+          </a:ln>
+        </p:spPr>
+        <p:style>
+          <a:lnRef idx="1">
+            <a:schemeClr val="accent1"/>
+          </a:lnRef>
+          <a:fillRef idx="3">
+            <a:schemeClr val="accent1"/>
+          </a:fillRef>
+          <a:effectRef idx="2">
+            <a:schemeClr val="accent1"/>
+          </a:effectRef>
+          <a:fontRef idx="minor">
+            <a:schemeClr val="lt1"/>
+          </a:fontRef>
+        </p:style>
+        <p:txBody>
+          <a:bodyPr rtlCol="0" anchor="ctr"/>
+          <a:lstStyle/>
+          <a:p>
+            <a:pPr algn="ctr"/>
+          </a:p>
+        </p:txBody>
+      </p:sp>
+      <p:sp>
+        <p:nvSpPr>
+          <p:cNvPr id="17" name="TextBox 16"/>
+          <p:cNvSpPr txBox="1"/>
+          <p:nvPr/>
+        </p:nvSpPr>
+        <p:spPr>
+          <a:xfrm>
+            <a:off x="5696712" y="5660136"/>
+            <a:ext cx="5461711" cy="493776"/>
+          </a:xfrm>
+          <a:prstGeom prst="rect">
+            <a:avLst/>
+          </a:prstGeom>
+          <a:noFill/>
+        </p:spPr>
+        <p:txBody>
+          <a:bodyPr wrap="square">
+            <a:spAutoFit/>
+          </a:bodyPr>
+          <a:lstStyle/>
+          <a:p>
+            <a:r>
+              <a:rPr sz="960" b="1">
+                <a:solidFill>
+                  <a:srgbClr val="000000"/>
+                </a:solidFill>
+                <a:latin typeface="Segoe UI"/>
+                <a:hlinkClick r:id="rId2"/>
+              </a:rPr>
+              <a:t>▶ BUKA KODE LENGKAP DI GITHUB (slide_08_oop_named_parameters.dart)</a:t>
+            </a:r>
+          </a:p>
+          <a:p>
+            <a:pPr>
+              <a:defRPr sz="760">
+                <a:solidFill>
+                  <a:srgbClr val="3C3C3C"/>
+                </a:solidFill>
+                <a:latin typeface="Segoe UI"/>
+              </a:defRPr>
+            </a:pPr>
+            <a:r>
+              <a:t>💡 Buka di browser / salin source code: github.com/antonprafanto/mobile2026</a:t>
             </a:r>
           </a:p>
         </p:txBody>
@@ -13194,8 +15093,8 @@
         </p:nvSpPr>
         <p:spPr>
           <a:xfrm>
-            <a:off x="5669280" y="2176272"/>
-            <a:ext cx="5486400" cy="3977639"/>
+            <a:off x="5669280" y="2121408"/>
+            <a:ext cx="5486400" cy="3364992"/>
           </a:xfrm>
           <a:prstGeom prst="rect">
             <a:avLst/>
@@ -13209,7 +15108,7 @@
           <a:lstStyle/>
           <a:p>
             <a:pPr>
-              <a:defRPr sz="980">
+              <a:defRPr sz="919">
                 <a:solidFill>
                   <a:srgbClr val="F5F5F5"/>
                 </a:solidFill>
@@ -13268,6 +15167,142 @@
             <a:br/>
             <a:r>
               <a:t>}</a:t>
+            </a:r>
+          </a:p>
+        </p:txBody>
+      </p:sp>
+      <p:sp>
+        <p:nvSpPr>
+          <p:cNvPr id="15" name="Rectangle 14"/>
+          <p:cNvSpPr/>
+          <p:nvPr/>
+        </p:nvSpPr>
+        <p:spPr>
+          <a:xfrm>
+            <a:off x="5660136" y="5669280"/>
+            <a:ext cx="5608015" cy="548640"/>
+          </a:xfrm>
+          <a:prstGeom prst="rect">
+            <a:avLst/>
+          </a:prstGeom>
+          <a:solidFill>
+            <a:srgbClr val="000000"/>
+          </a:solidFill>
+          <a:ln>
+            <a:noFill/>
+          </a:ln>
+        </p:spPr>
+        <p:style>
+          <a:lnRef idx="1">
+            <a:schemeClr val="accent1"/>
+          </a:lnRef>
+          <a:fillRef idx="3">
+            <a:schemeClr val="accent1"/>
+          </a:fillRef>
+          <a:effectRef idx="2">
+            <a:schemeClr val="accent1"/>
+          </a:effectRef>
+          <a:fontRef idx="minor">
+            <a:schemeClr val="lt1"/>
+          </a:fontRef>
+        </p:style>
+        <p:txBody>
+          <a:bodyPr rtlCol="0" anchor="ctr"/>
+          <a:lstStyle/>
+          <a:p>
+            <a:pPr algn="ctr"/>
+          </a:p>
+        </p:txBody>
+      </p:sp>
+      <p:sp>
+        <p:nvSpPr>
+          <p:cNvPr id="16" name="Rectangle 15"/>
+          <p:cNvSpPr/>
+          <p:nvPr/>
+        </p:nvSpPr>
+        <p:spPr>
+          <a:xfrm>
+            <a:off x="5623560" y="5632704"/>
+            <a:ext cx="5608015" cy="548640"/>
+          </a:xfrm>
+          <a:prstGeom prst="rect">
+            <a:avLst/>
+          </a:prstGeom>
+          <a:solidFill>
+            <a:srgbClr val="FFE600"/>
+          </a:solidFill>
+          <a:ln w="25400">
+            <a:solidFill>
+              <a:srgbClr val="000000"/>
+            </a:solidFill>
+          </a:ln>
+        </p:spPr>
+        <p:style>
+          <a:lnRef idx="1">
+            <a:schemeClr val="accent1"/>
+          </a:lnRef>
+          <a:fillRef idx="3">
+            <a:schemeClr val="accent1"/>
+          </a:fillRef>
+          <a:effectRef idx="2">
+            <a:schemeClr val="accent1"/>
+          </a:effectRef>
+          <a:fontRef idx="minor">
+            <a:schemeClr val="lt1"/>
+          </a:fontRef>
+        </p:style>
+        <p:txBody>
+          <a:bodyPr rtlCol="0" anchor="ctr"/>
+          <a:lstStyle/>
+          <a:p>
+            <a:pPr algn="ctr"/>
+          </a:p>
+        </p:txBody>
+      </p:sp>
+      <p:sp>
+        <p:nvSpPr>
+          <p:cNvPr id="17" name="TextBox 16"/>
+          <p:cNvSpPr txBox="1"/>
+          <p:nvPr/>
+        </p:nvSpPr>
+        <p:spPr>
+          <a:xfrm>
+            <a:off x="5696712" y="5660136"/>
+            <a:ext cx="5461711" cy="493776"/>
+          </a:xfrm>
+          <a:prstGeom prst="rect">
+            <a:avLst/>
+          </a:prstGeom>
+          <a:noFill/>
+        </p:spPr>
+        <p:txBody>
+          <a:bodyPr wrap="square">
+            <a:spAutoFit/>
+          </a:bodyPr>
+          <a:lstStyle/>
+          <a:p>
+            <a:r>
+              <a:rPr sz="960" b="1">
+                <a:solidFill>
+                  <a:srgbClr val="000000"/>
+                </a:solidFill>
+                <a:latin typeface="Segoe UI"/>
+                <a:hlinkClick r:id="rId2"/>
+              </a:rPr>
+              <a:t>▶ BUKA KODE LENGKAP DI GITHUB (slide_09_mixins_with_keyword.dart)</a:t>
+            </a:r>
+          </a:p>
+          <a:p>
+            <a:pPr>
+              <a:defRPr sz="760">
+                <a:solidFill>
+                  <a:srgbClr val="3C3C3C"/>
+                </a:solidFill>
+                <a:latin typeface="Segoe UI"/>
+              </a:defRPr>
+            </a:pPr>
+            <a:r>
+              <a:t>💡 Buka di browser / salin source code: github.com/antonprafanto/mobile2026</a:t>
             </a:r>
           </a:p>
         </p:txBody>

--- a/03_slide_presentasi/PERTEMUAN_02_Modern_Dart_Programming.pptx
+++ b/03_slide_presentasi/PERTEMUAN_02_Modern_Dart_Programming.pptx
@@ -4750,7 +4750,7 @@
             </a:r>
             <a:br/>
             <a:r>
-              <a:t>  final List&lt;String&gt; hobi = ['Ngoding', 'Membaca', 'Ngoding'];</a:t>
+              <a:t>  final List&lt;String&gt; hobi = ['Flutter', 'Algoritma', 'Flutter'];</a:t>
             </a:r>
             <a:br/>
             <a:r>
@@ -5284,7 +5284,7 @@
               </a:defRPr>
             </a:pPr>
             <a:r>
-              <a:t>■  Tinggalkan perulangan for loop manual kuno!</a:t>
+              <a:t>■  Tinggalkan perulangan for loop manual imperatif!</a:t>
             </a:r>
           </a:p>
           <a:p>
@@ -9207,7 +9207,7 @@
               </a:defRPr>
             </a:pPr>
             <a:r>
-              <a:t>■  Opsi 1 (Paling Ringan &amp; Instan): Buka browser dan kunjungi dartpad.dev. Bisa langsung ngoding dan tekan tombol 'Run' tanpa instalasi!</a:t>
+              <a:t>■  Opsi 1 (Paling Ringan &amp; Instan): Buka browser dan kunjungi dartpad.dev. Bisa langsung menulis kode dan menekan tombol 'Run' tanpa instalasi!</a:t>
             </a:r>
           </a:p>
           <a:p>
@@ -12270,7 +12270,7 @@
               </a:defRPr>
             </a:pPr>
             <a:r>
-              <a:t>Empat Operator Sakti Pengaman Data Kosong</a:t>
+              <a:t>Empat Operator Penjamin Nilai Aman (Null Safety Operators)</a:t>
             </a:r>
           </a:p>
         </p:txBody>

--- a/03_slide_presentasi/PERTEMUAN_02_Modern_Dart_Programming.pptx
+++ b/03_slide_presentasi/PERTEMUAN_02_Modern_Dart_Programming.pptx
@@ -3276,7 +3276,7 @@
               <a:spcAft>
                 <a:spcPts val="1400"/>
               </a:spcAft>
-              <a:defRPr sz="3100" b="1">
+              <a:defRPr sz="3000" b="1">
                 <a:solidFill>
                   <a:srgbClr val="000000"/>
                 </a:solidFill>
@@ -3294,7 +3294,7 @@
           <a:p>
             <a:pPr>
               <a:spcAft>
-                <a:spcPts val="4000"/>
+                <a:spcPts val="3800"/>
               </a:spcAft>
               <a:defRPr sz="1500">
                 <a:solidFill>
@@ -3317,7 +3317,7 @@
               </a:defRPr>
             </a:pPr>
             <a:r>
-              <a:t>■  Program Studi Teknik Informatika  ■  OUTCOME-BASED EDUCATION (OBE)</a:t>
+              <a:t>■  Program Studi Teknik Informatika  ■  OUTCOME-BASED EDUCATION (OBE) • SUB-CPMK 2</a:t>
             </a:r>
           </a:p>
         </p:txBody>
@@ -3665,15 +3665,15 @@
               </a:defRPr>
             </a:pPr>
             <a:r>
-              <a:t>KONSEP &amp; CARA KERJA</a:t>
+              <a:t>KONSEP &amp; ALUR KERJA</a:t>
             </a:r>
           </a:p>
           <a:p>
             <a:pPr>
               <a:spcAft>
-                <a:spcPts val="600"/>
+                <a:spcPts val="500"/>
               </a:spcAft>
-              <a:defRPr sz="1100">
+              <a:defRPr sz="1060">
                 <a:solidFill>
                   <a:srgbClr val="141414"/>
                 </a:solidFill>
@@ -3687,9 +3687,9 @@
           <a:p>
             <a:pPr>
               <a:spcAft>
-                <a:spcPts val="600"/>
+                <a:spcPts val="500"/>
               </a:spcAft>
-              <a:defRPr sz="1100">
+              <a:defRPr sz="1060">
                 <a:solidFill>
                   <a:srgbClr val="141414"/>
                 </a:solidFill>
@@ -3703,9 +3703,9 @@
           <a:p>
             <a:pPr>
               <a:spcAft>
-                <a:spcPts val="600"/>
+                <a:spcPts val="500"/>
               </a:spcAft>
-              <a:defRPr sz="1100">
+              <a:defRPr sz="1060">
                 <a:solidFill>
                   <a:srgbClr val="141414"/>
                 </a:solidFill>
@@ -3719,9 +3719,9 @@
           <a:p>
             <a:pPr>
               <a:spcAft>
-                <a:spcPts val="600"/>
+                <a:spcPts val="500"/>
               </a:spcAft>
-              <a:defRPr sz="1100">
+              <a:defRPr sz="1060">
                 <a:solidFill>
                   <a:srgbClr val="141414"/>
                 </a:solidFill>
@@ -3734,7 +3734,7 @@
           </a:p>
           <a:p>
             <a:pPr>
-              <a:defRPr sz="1050" b="1">
+              <a:defRPr sz="1019" b="1">
                 <a:solidFill>
                   <a:srgbClr val="000000"/>
                 </a:solidFill>
@@ -3742,7 +3742,7 @@
               </a:defRPr>
             </a:pPr>
             <a:r>
-              <a:t>💡 Tips Praktik: Extension method membuat kode aplikasi Anda sangat rapi dan mudah dibaca!</a:t>
+              <a:t>💡 Tips Praktis: Extension method membuat kode aplikasi Anda sangat rapi dan mudah dibaca!</a:t>
             </a:r>
           </a:p>
         </p:txBody>
@@ -3850,7 +3850,7 @@
             <a:avLst/>
           </a:prstGeom>
           <a:solidFill>
-            <a:srgbClr val="FFE600"/>
+            <a:srgbClr val="FB7185"/>
           </a:solidFill>
           <a:ln w="31750">
             <a:solidFill>
@@ -3911,7 +3911,7 @@
               </a:defRPr>
             </a:pPr>
             <a:r>
-              <a:t>extension_methods.dart  |  DART CODE RUNNABLE</a:t>
+              <a:t>extension_methods.dart  |  KODE IMPLEMENTASI</a:t>
             </a:r>
           </a:p>
         </p:txBody>
@@ -3939,7 +3939,7 @@
           <a:lstStyle/>
           <a:p>
             <a:pPr>
-              <a:defRPr sz="919">
+              <a:defRPr sz="910">
                 <a:solidFill>
                   <a:srgbClr val="F5F5F5"/>
                 </a:solidFill>
@@ -4476,15 +4476,15 @@
               </a:defRPr>
             </a:pPr>
             <a:r>
-              <a:t>KONSEP &amp; CARA KERJA</a:t>
+              <a:t>KONSEP &amp; ALUR KERJA</a:t>
             </a:r>
           </a:p>
           <a:p>
             <a:pPr>
               <a:spcAft>
-                <a:spcPts val="600"/>
+                <a:spcPts val="500"/>
               </a:spcAft>
-              <a:defRPr sz="1100">
+              <a:defRPr sz="1060">
                 <a:solidFill>
                   <a:srgbClr val="141414"/>
                 </a:solidFill>
@@ -4498,9 +4498,9 @@
           <a:p>
             <a:pPr>
               <a:spcAft>
-                <a:spcPts val="600"/>
+                <a:spcPts val="500"/>
               </a:spcAft>
-              <a:defRPr sz="1100">
+              <a:defRPr sz="1060">
                 <a:solidFill>
                   <a:srgbClr val="141414"/>
                 </a:solidFill>
@@ -4514,9 +4514,9 @@
           <a:p>
             <a:pPr>
               <a:spcAft>
-                <a:spcPts val="600"/>
+                <a:spcPts val="500"/>
               </a:spcAft>
-              <a:defRPr sz="1100">
+              <a:defRPr sz="1060">
                 <a:solidFill>
                   <a:srgbClr val="141414"/>
                 </a:solidFill>
@@ -4529,7 +4529,7 @@
           </a:p>
           <a:p>
             <a:pPr>
-              <a:defRPr sz="1050" b="1">
+              <a:defRPr sz="1019" b="1">
                 <a:solidFill>
                   <a:srgbClr val="000000"/>
                 </a:solidFill>
@@ -4537,7 +4537,7 @@
               </a:defRPr>
             </a:pPr>
             <a:r>
-              <a:t>💡 Tips Praktik: Gunakan Map untuk menampung respon JSON dari REST API!</a:t>
+              <a:t>💡 Tips Praktis: Gunakan Map untuk menampung respon JSON dari REST API!</a:t>
             </a:r>
           </a:p>
         </p:txBody>
@@ -4706,7 +4706,7 @@
               </a:defRPr>
             </a:pPr>
             <a:r>
-              <a:t>collections_demo.dart  |  DART CODE RUNNABLE</a:t>
+              <a:t>collections_demo.dart  |  KODE IMPLEMENTASI</a:t>
             </a:r>
           </a:p>
         </p:txBody>
@@ -4734,7 +4734,7 @@
           <a:lstStyle/>
           <a:p>
             <a:pPr>
-              <a:defRPr sz="919">
+              <a:defRPr sz="910">
                 <a:solidFill>
                   <a:srgbClr val="F5F5F5"/>
                 </a:solidFill>
@@ -5268,15 +5268,15 @@
               </a:defRPr>
             </a:pPr>
             <a:r>
-              <a:t>KONSEP &amp; CARA KERJA</a:t>
+              <a:t>KONSEP &amp; ALUR KERJA</a:t>
             </a:r>
           </a:p>
           <a:p>
             <a:pPr>
               <a:spcAft>
-                <a:spcPts val="600"/>
+                <a:spcPts val="500"/>
               </a:spcAft>
-              <a:defRPr sz="1100">
+              <a:defRPr sz="1060">
                 <a:solidFill>
                   <a:srgbClr val="141414"/>
                 </a:solidFill>
@@ -5290,9 +5290,9 @@
           <a:p>
             <a:pPr>
               <a:spcAft>
-                <a:spcPts val="600"/>
+                <a:spcPts val="500"/>
               </a:spcAft>
-              <a:defRPr sz="1100">
+              <a:defRPr sz="1060">
                 <a:solidFill>
                   <a:srgbClr val="141414"/>
                 </a:solidFill>
@@ -5306,9 +5306,9 @@
           <a:p>
             <a:pPr>
               <a:spcAft>
-                <a:spcPts val="600"/>
+                <a:spcPts val="500"/>
               </a:spcAft>
-              <a:defRPr sz="1100">
+              <a:defRPr sz="1060">
                 <a:solidFill>
                   <a:srgbClr val="141414"/>
                 </a:solidFill>
@@ -5322,9 +5322,9 @@
           <a:p>
             <a:pPr>
               <a:spcAft>
-                <a:spcPts val="600"/>
+                <a:spcPts val="500"/>
               </a:spcAft>
-              <a:defRPr sz="1100">
+              <a:defRPr sz="1060">
                 <a:solidFill>
                   <a:srgbClr val="141414"/>
                 </a:solidFill>
@@ -5337,7 +5337,7 @@
           </a:p>
           <a:p>
             <a:pPr>
-              <a:defRPr sz="1050" b="1">
+              <a:defRPr sz="1019" b="1">
                 <a:solidFill>
                   <a:srgbClr val="000000"/>
                 </a:solidFill>
@@ -5345,7 +5345,7 @@
               </a:defRPr>
             </a:pPr>
             <a:r>
-              <a:t>💡 Tips Praktik: Rangkaian .where() dan .map() adalah teknik standar industri dalam mengolah data di Flutter!</a:t>
+              <a:t>💡 Tips Praktis: Rangkaian .where() dan .map() adalah teknik standar industri dalam mengolah data di Flutter!</a:t>
             </a:r>
           </a:p>
         </p:txBody>
@@ -5453,7 +5453,7 @@
             <a:avLst/>
           </a:prstGeom>
           <a:solidFill>
-            <a:srgbClr val="FFE600"/>
+            <a:srgbClr val="4ADE80"/>
           </a:solidFill>
           <a:ln w="31750">
             <a:solidFill>
@@ -5514,7 +5514,7 @@
               </a:defRPr>
             </a:pPr>
             <a:r>
-              <a:t>reactive_collections.dart  |  DART CODE RUNNABLE</a:t>
+              <a:t>reactive_collections.dart  |  KODE IMPLEMENTASI</a:t>
             </a:r>
           </a:p>
         </p:txBody>
@@ -5542,7 +5542,7 @@
           <a:lstStyle/>
           <a:p>
             <a:pPr>
-              <a:defRPr sz="919">
+              <a:defRPr sz="910">
                 <a:solidFill>
                   <a:srgbClr val="F5F5F5"/>
                 </a:solidFill>
@@ -6068,15 +6068,15 @@
               </a:defRPr>
             </a:pPr>
             <a:r>
-              <a:t>KONSEP &amp; CARA KERJA</a:t>
+              <a:t>KONSEP &amp; ALUR KERJA</a:t>
             </a:r>
           </a:p>
           <a:p>
             <a:pPr>
               <a:spcAft>
-                <a:spcPts val="600"/>
+                <a:spcPts val="500"/>
               </a:spcAft>
-              <a:defRPr sz="1100">
+              <a:defRPr sz="1060">
                 <a:solidFill>
                   <a:srgbClr val="141414"/>
                 </a:solidFill>
@@ -6090,9 +6090,9 @@
           <a:p>
             <a:pPr>
               <a:spcAft>
-                <a:spcPts val="600"/>
+                <a:spcPts val="500"/>
               </a:spcAft>
-              <a:defRPr sz="1100">
+              <a:defRPr sz="1060">
                 <a:solidFill>
                   <a:srgbClr val="141414"/>
                 </a:solidFill>
@@ -6106,9 +6106,9 @@
           <a:p>
             <a:pPr>
               <a:spcAft>
-                <a:spcPts val="600"/>
+                <a:spcPts val="500"/>
               </a:spcAft>
-              <a:defRPr sz="1100">
+              <a:defRPr sz="1060">
                 <a:solidFill>
                   <a:srgbClr val="141414"/>
                 </a:solidFill>
@@ -6122,9 +6122,9 @@
           <a:p>
             <a:pPr>
               <a:spcAft>
-                <a:spcPts val="600"/>
+                <a:spcPts val="500"/>
               </a:spcAft>
-              <a:defRPr sz="1100">
+              <a:defRPr sz="1060">
                 <a:solidFill>
                   <a:srgbClr val="141414"/>
                 </a:solidFill>
@@ -6137,7 +6137,7 @@
           </a:p>
           <a:p>
             <a:pPr>
-              <a:defRPr sz="1050" b="1">
+              <a:defRPr sz="1019" b="1">
                 <a:solidFill>
                   <a:srgbClr val="000000"/>
                 </a:solidFill>
@@ -6145,7 +6145,7 @@
               </a:defRPr>
             </a:pPr>
             <a:r>
-              <a:t>💡 Tips Praktik: Semua proses jaringan internet, database, dan GPS di mobile WAJIB berjalan secara asinkron!</a:t>
+              <a:t>💡 Tips Praktis: Semua proses jaringan internet, database, dan GPS di mobile WAJIB berjalan secara asinkron!</a:t>
             </a:r>
           </a:p>
         </p:txBody>
@@ -6253,7 +6253,7 @@
             <a:avLst/>
           </a:prstGeom>
           <a:solidFill>
-            <a:srgbClr val="FFE600"/>
+            <a:srgbClr val="38BDF8"/>
           </a:solidFill>
           <a:ln w="31750">
             <a:solidFill>
@@ -6314,7 +6314,7 @@
               </a:defRPr>
             </a:pPr>
             <a:r>
-              <a:t>sync_vs_async.dart  |  DART CODE RUNNABLE</a:t>
+              <a:t>sync_vs_async.dart  |  KODE IMPLEMENTASI</a:t>
             </a:r>
           </a:p>
         </p:txBody>
@@ -6342,7 +6342,7 @@
           <a:lstStyle/>
           <a:p>
             <a:pPr>
-              <a:defRPr sz="919">
+              <a:defRPr sz="910">
                 <a:solidFill>
                   <a:srgbClr val="F5F5F5"/>
                 </a:solidFill>
@@ -6875,15 +6875,15 @@
               </a:defRPr>
             </a:pPr>
             <a:r>
-              <a:t>KONSEP &amp; CARA KERJA</a:t>
+              <a:t>KONSEP &amp; ALUR KERJA</a:t>
             </a:r>
           </a:p>
           <a:p>
             <a:pPr>
               <a:spcAft>
-                <a:spcPts val="600"/>
+                <a:spcPts val="500"/>
               </a:spcAft>
-              <a:defRPr sz="1100">
+              <a:defRPr sz="1060">
                 <a:solidFill>
                   <a:srgbClr val="141414"/>
                 </a:solidFill>
@@ -6897,9 +6897,9 @@
           <a:p>
             <a:pPr>
               <a:spcAft>
-                <a:spcPts val="600"/>
+                <a:spcPts val="500"/>
               </a:spcAft>
-              <a:defRPr sz="1100">
+              <a:defRPr sz="1060">
                 <a:solidFill>
                   <a:srgbClr val="141414"/>
                 </a:solidFill>
@@ -6913,9 +6913,9 @@
           <a:p>
             <a:pPr>
               <a:spcAft>
-                <a:spcPts val="600"/>
+                <a:spcPts val="500"/>
               </a:spcAft>
-              <a:defRPr sz="1100">
+              <a:defRPr sz="1060">
                 <a:solidFill>
                   <a:srgbClr val="141414"/>
                 </a:solidFill>
@@ -6929,9 +6929,9 @@
           <a:p>
             <a:pPr>
               <a:spcAft>
-                <a:spcPts val="600"/>
+                <a:spcPts val="500"/>
               </a:spcAft>
-              <a:defRPr sz="1100">
+              <a:defRPr sz="1060">
                 <a:solidFill>
                   <a:srgbClr val="141414"/>
                 </a:solidFill>
@@ -6944,7 +6944,7 @@
           </a:p>
           <a:p>
             <a:pPr>
-              <a:defRPr sz="1050" b="1">
+              <a:defRPr sz="1019" b="1">
                 <a:solidFill>
                   <a:srgbClr val="000000"/>
                 </a:solidFill>
@@ -6952,7 +6952,7 @@
               </a:defRPr>
             </a:pPr>
             <a:r>
-              <a:t>💡 Tips Praktik: Konsep 'async/await' adalah standar emas saat kita menghubungkan Flutter ke REST API di Minggu ke-9!</a:t>
+              <a:t>💡 Tips Praktis: Konsep 'async/await' adalah standar emas saat kita menghubungkan Flutter ke REST API di Minggu ke-9!</a:t>
             </a:r>
           </a:p>
         </p:txBody>
@@ -7060,7 +7060,7 @@
             <a:avLst/>
           </a:prstGeom>
           <a:solidFill>
-            <a:srgbClr val="FFE600"/>
+            <a:srgbClr val="C084FC"/>
           </a:solidFill>
           <a:ln w="31750">
             <a:solidFill>
@@ -7121,7 +7121,7 @@
               </a:defRPr>
             </a:pPr>
             <a:r>
-              <a:t>async_await_demo.dart  |  DART CODE RUNNABLE</a:t>
+              <a:t>async_await_demo.dart  |  KODE IMPLEMENTASI</a:t>
             </a:r>
           </a:p>
         </p:txBody>
@@ -7149,7 +7149,7 @@
           <a:lstStyle/>
           <a:p>
             <a:pPr>
-              <a:defRPr sz="919">
+              <a:defRPr sz="910">
                 <a:solidFill>
                   <a:srgbClr val="F5F5F5"/>
                 </a:solidFill>
@@ -7698,15 +7698,15 @@
               </a:defRPr>
             </a:pPr>
             <a:r>
-              <a:t>KONSEP &amp; CARA KERJA</a:t>
+              <a:t>KONSEP &amp; ALUR KERJA</a:t>
             </a:r>
           </a:p>
           <a:p>
             <a:pPr>
               <a:spcAft>
-                <a:spcPts val="600"/>
+                <a:spcPts val="500"/>
               </a:spcAft>
-              <a:defRPr sz="1100">
+              <a:defRPr sz="1060">
                 <a:solidFill>
                   <a:srgbClr val="141414"/>
                 </a:solidFill>
@@ -7720,9 +7720,9 @@
           <a:p>
             <a:pPr>
               <a:spcAft>
-                <a:spcPts val="600"/>
+                <a:spcPts val="500"/>
               </a:spcAft>
-              <a:defRPr sz="1100">
+              <a:defRPr sz="1060">
                 <a:solidFill>
                   <a:srgbClr val="141414"/>
                 </a:solidFill>
@@ -7736,9 +7736,9 @@
           <a:p>
             <a:pPr>
               <a:spcAft>
-                <a:spcPts val="600"/>
+                <a:spcPts val="500"/>
               </a:spcAft>
-              <a:defRPr sz="1100">
+              <a:defRPr sz="1060">
                 <a:solidFill>
                   <a:srgbClr val="141414"/>
                 </a:solidFill>
@@ -7752,9 +7752,9 @@
           <a:p>
             <a:pPr>
               <a:spcAft>
-                <a:spcPts val="600"/>
+                <a:spcPts val="500"/>
               </a:spcAft>
-              <a:defRPr sz="1100">
+              <a:defRPr sz="1060">
                 <a:solidFill>
                   <a:srgbClr val="141414"/>
                 </a:solidFill>
@@ -7767,7 +7767,7 @@
           </a:p>
           <a:p>
             <a:pPr>
-              <a:defRPr sz="1050" b="1">
+              <a:defRPr sz="1019" b="1">
                 <a:solidFill>
                   <a:srgbClr val="000000"/>
                 </a:solidFill>
@@ -7775,7 +7775,7 @@
               </a:defRPr>
             </a:pPr>
             <a:r>
-              <a:t>💡 Tips Praktik: Stream adalah fondasi utama dari arsitektur reaktif BLoC yang akan kita pakai di aplikasi skala besar!</a:t>
+              <a:t>💡 Tips Praktis: Stream adalah fondasi utama dari arsitektur reaktif BLoC yang akan kita pakai di aplikasi skala besar!</a:t>
             </a:r>
           </a:p>
         </p:txBody>
@@ -7883,7 +7883,7 @@
             <a:avLst/>
           </a:prstGeom>
           <a:solidFill>
-            <a:srgbClr val="FFE600"/>
+            <a:srgbClr val="FB7185"/>
           </a:solidFill>
           <a:ln w="31750">
             <a:solidFill>
@@ -7944,7 +7944,7 @@
               </a:defRPr>
             </a:pPr>
             <a:r>
-              <a:t>stream_demo.dart  |  DART CODE RUNNABLE</a:t>
+              <a:t>stream_demo.dart  |  KODE IMPLEMENTASI</a:t>
             </a:r>
           </a:p>
         </p:txBody>
@@ -7972,7 +7972,7 @@
           <a:lstStyle/>
           <a:p>
             <a:pPr>
-              <a:defRPr sz="919">
+              <a:defRPr sz="910">
                 <a:solidFill>
                   <a:srgbClr val="F5F5F5"/>
                 </a:solidFill>
@@ -8559,7 +8559,7 @@
               </a:defRPr>
             </a:pPr>
             <a:r>
-              <a:t>⏱️ ALOKASI: 45 MENIT  ■  TARGET UJI: DARTPAD (BROWSER) ATAU VS CODE TERMINAL</a:t>
+              <a:t>⏱️ ALOKASI: 45 MENIT  ■  TARGET UJI: BROWSER CHROME ATAU SMARTPHONE FISIK</a:t>
             </a:r>
           </a:p>
         </p:txBody>
@@ -8572,7 +8572,7 @@
         </p:nvSpPr>
         <p:spPr>
           <a:xfrm>
-            <a:off x="1188720" y="2212848"/>
+            <a:off x="1188720" y="2194560"/>
             <a:ext cx="9784080" cy="3291840"/>
           </a:xfrm>
           <a:prstGeom prst="rect">
@@ -8588,25 +8588,41 @@
           <a:p>
             <a:pPr>
               <a:spcAft>
+                <a:spcPts val="600"/>
+              </a:spcAft>
+              <a:defRPr sz="1200" b="1">
+                <a:solidFill>
+                  <a:srgbClr val="000000"/>
+                </a:solidFill>
+                <a:latin typeface="Segoe UI"/>
+              </a:defRPr>
+            </a:pPr>
+            <a:r>
+              <a:t>LANGKAH KERJA &amp; SPESIFIKASI TUGAS:</a:t>
+            </a:r>
+          </a:p>
+          <a:p>
+            <a:pPr>
+              <a:spcAft>
                 <a:spcPts val="400"/>
               </a:spcAft>
-              <a:defRPr sz="1350" b="1">
-                <a:solidFill>
-                  <a:srgbClr val="000000"/>
+              <a:defRPr sz="1040">
+                <a:solidFill>
+                  <a:srgbClr val="1E1E1E"/>
                 </a:solidFill>
                 <a:latin typeface="Segoe UI"/>
               </a:defRPr>
             </a:pPr>
             <a:r>
-              <a:t>Checklist Langkah Praktikum di Lab:</a:t>
+              <a:t>✔  Buka browser dan akses DartPad (dartpad.dev) atau buat berkas 'tugas2.dart' di VS Code.</a:t>
             </a:r>
           </a:p>
           <a:p>
             <a:pPr>
               <a:spcAft>
-                <a:spcPts val="200"/>
+                <a:spcPts val="400"/>
               </a:spcAft>
-              <a:defRPr sz="1050">
+              <a:defRPr sz="1040">
                 <a:solidFill>
                   <a:srgbClr val="1E1E1E"/>
                 </a:solidFill>
@@ -8614,15 +8630,15 @@
               </a:defRPr>
             </a:pPr>
             <a:r>
-              <a:t>  [  ]   Buka browser dan akses DartPad (dartpad.dev) atau buat berkas 'tugas2.dart' di VS Code.</a:t>
+              <a:t>✔  Buat Class 'Pesanan' dengan named parameters: namaPemesan (String), namaKopi (String), harga (int), dan catatan (String? nullable).</a:t>
             </a:r>
           </a:p>
           <a:p>
             <a:pPr>
               <a:spcAft>
-                <a:spcPts val="200"/>
+                <a:spcPts val="400"/>
               </a:spcAft>
-              <a:defRPr sz="1050">
+              <a:defRPr sz="1040">
                 <a:solidFill>
                   <a:srgbClr val="1E1E1E"/>
                 </a:solidFill>
@@ -8630,15 +8646,15 @@
               </a:defRPr>
             </a:pPr>
             <a:r>
-              <a:t>  [  ]   Buat Class 'Pesanan' dengan named parameters: namaPemesan (String), namaKopi (String), harga (int), dan catatan (String? nullable).</a:t>
+              <a:t>✔  Terapkan operator fallback (??) agar jika catatan null, otomatis tertulis: 'Standar Normal'.</a:t>
             </a:r>
           </a:p>
           <a:p>
             <a:pPr>
               <a:spcAft>
-                <a:spcPts val="200"/>
+                <a:spcPts val="400"/>
               </a:spcAft>
-              <a:defRPr sz="1050">
+              <a:defRPr sz="1040">
                 <a:solidFill>
                   <a:srgbClr val="1E1E1E"/>
                 </a:solidFill>
@@ -8646,15 +8662,15 @@
               </a:defRPr>
             </a:pPr>
             <a:r>
-              <a:t>  [  ]   Terapkan operator fallback (??) agar jika catatan null, otomatis tertulis: 'Standar Normal'.</a:t>
+              <a:t>✔  Buat fungsi asinkron 'ambilResep(Pesanan p)' yang menggunakan Future.delayed selama 2 detik.</a:t>
             </a:r>
           </a:p>
           <a:p>
             <a:pPr>
               <a:spcAft>
-                <a:spcPts val="200"/>
+                <a:spcPts val="400"/>
               </a:spcAft>
-              <a:defRPr sz="1050">
+              <a:defRPr sz="1040">
                 <a:solidFill>
                   <a:srgbClr val="1E1E1E"/>
                 </a:solidFill>
@@ -8662,15 +8678,15 @@
               </a:defRPr>
             </a:pPr>
             <a:r>
-              <a:t>  [  ]   Buat fungsi asinkron 'ambilResep(Pesanan p)' yang menggunakan Future.delayed selama 2 detik.</a:t>
+              <a:t>✔  Jika harga pesanan &lt;= 0, lemparkan pesan galat (Exception: 'Harga tidak valid!') dan tangkap dengan blok try-catch.</a:t>
             </a:r>
           </a:p>
           <a:p>
             <a:pPr>
               <a:spcAft>
-                <a:spcPts val="200"/>
+                <a:spcPts val="400"/>
               </a:spcAft>
-              <a:defRPr sz="1050">
+              <a:defRPr sz="1040">
                 <a:solidFill>
                   <a:srgbClr val="1E1E1E"/>
                 </a:solidFill>
@@ -8678,36 +8694,20 @@
               </a:defRPr>
             </a:pPr>
             <a:r>
-              <a:t>  [  ]   Jika harga pesanan &lt;= 0, lemparkan pesan galat (Exception: 'Harga tidak valid!') dan tangkap dengan blok try-catch.</a:t>
-            </a:r>
-          </a:p>
-          <a:p>
-            <a:pPr>
-              <a:spcAft>
-                <a:spcPts val="200"/>
-              </a:spcAft>
-              <a:defRPr sz="1050">
-                <a:solidFill>
-                  <a:srgbClr val="1E1E1E"/>
+              <a:t>✔  Tantangan Bonus: Buat fungsi Stream 'lacakPembuatan()' yang mengalirkan status: '1. Menggiling Biji' -&gt; '2. Menyeduh Air' -&gt; '3. Kopi Siap!'.</a:t>
+            </a:r>
+          </a:p>
+          <a:p>
+            <a:pPr>
+              <a:defRPr sz="1080" b="1">
+                <a:solidFill>
+                  <a:srgbClr val="0A6428"/>
                 </a:solidFill>
                 <a:latin typeface="Segoe UI"/>
               </a:defRPr>
             </a:pPr>
             <a:r>
-              <a:t>  [  ]   Tantangan Bonus: Buat fungsi Stream 'lacakPembuatan()' yang mengalirkan status: '1. Menggiling Biji' -&gt; '2. Menyeduh Air' -&gt; '3. Kopi Siap!'.</a:t>
-            </a:r>
-          </a:p>
-          <a:p>
-            <a:pPr>
-              <a:defRPr sz="1100" b="1">
-                <a:solidFill>
-                  <a:srgbClr val="00823C"/>
-                </a:solidFill>
-                <a:latin typeface="Segoe UI"/>
-              </a:defRPr>
-            </a:pPr>
-            <a:r>
-              <a:t>✔ Kriteria Keberhasilan (Tunjukkan ke Dosen/Asisten Lab): Tunjukkan hasil eksekusi terminal di DartPad/VS Code kepada Dosen atau Asisten Lab untuk mendapatkan checklist nilai modul 2.</a:t>
+              <a:t>🎯 TARGET SELESAI: Tunjukkan hasil eksekusi terminal di DartPad/VS Code kepada Dosen atau Asisten Lab untuk mendapatkan checklist nilai modul 2.</a:t>
             </a:r>
           </a:p>
         </p:txBody>
@@ -8720,8 +8720,8 @@
         </p:nvSpPr>
         <p:spPr>
           <a:xfrm>
-            <a:off x="1225296" y="5669280"/>
-            <a:ext cx="9784080" cy="502920"/>
+            <a:off x="1225296" y="5632704"/>
+            <a:ext cx="9784080" cy="566928"/>
           </a:xfrm>
           <a:prstGeom prst="rect">
             <a:avLst/>
@@ -8763,14 +8763,14 @@
         </p:nvSpPr>
         <p:spPr>
           <a:xfrm>
-            <a:off x="1188720" y="5632704"/>
-            <a:ext cx="9784080" cy="502920"/>
-          </a:xfrm>
-          <a:prstGeom prst="rect">
-            <a:avLst/>
-          </a:prstGeom>
-          <a:solidFill>
-            <a:srgbClr val="4ADE80"/>
+            <a:off x="1188720" y="5596128"/>
+            <a:ext cx="9784080" cy="566928"/>
+          </a:xfrm>
+          <a:prstGeom prst="rect">
+            <a:avLst/>
+          </a:prstGeom>
+          <a:solidFill>
+            <a:srgbClr val="FFE600"/>
           </a:solidFill>
           <a:ln w="25400">
             <a:solidFill>
@@ -8808,8 +8808,8 @@
         </p:nvSpPr>
         <p:spPr>
           <a:xfrm>
-            <a:off x="1261872" y="5660136"/>
-            <a:ext cx="9637776" cy="448056"/>
+            <a:off x="1298448" y="5623560"/>
+            <a:ext cx="9564624" cy="512064"/>
           </a:xfrm>
           <a:prstGeom prst="rect">
             <a:avLst/>
@@ -8823,7 +8823,7 @@
           <a:lstStyle/>
           <a:p>
             <a:r>
-              <a:rPr sz="1000" b="1">
+              <a:rPr sz="1100" b="1">
                 <a:solidFill>
                   <a:srgbClr val="000000"/>
                 </a:solidFill>
@@ -8835,9 +8835,9 @@
           </a:p>
           <a:p>
             <a:pPr>
-              <a:defRPr sz="800">
-                <a:solidFill>
-                  <a:srgbClr val="3C3C3C"/>
+              <a:defRPr sz="830">
+                <a:solidFill>
+                  <a:srgbClr val="323232"/>
                 </a:solidFill>
                 <a:latin typeface="Segoe UI"/>
               </a:defRPr>
@@ -9191,15 +9191,15 @@
               </a:defRPr>
             </a:pPr>
             <a:r>
-              <a:t>KONSEP &amp; CARA KERJA</a:t>
+              <a:t>KONSEP &amp; ALUR KERJA</a:t>
             </a:r>
           </a:p>
           <a:p>
             <a:pPr>
               <a:spcAft>
-                <a:spcPts val="600"/>
+                <a:spcPts val="500"/>
               </a:spcAft>
-              <a:defRPr sz="1100">
+              <a:defRPr sz="1060">
                 <a:solidFill>
                   <a:srgbClr val="141414"/>
                 </a:solidFill>
@@ -9213,9 +9213,9 @@
           <a:p>
             <a:pPr>
               <a:spcAft>
-                <a:spcPts val="600"/>
+                <a:spcPts val="500"/>
               </a:spcAft>
-              <a:defRPr sz="1100">
+              <a:defRPr sz="1060">
                 <a:solidFill>
                   <a:srgbClr val="141414"/>
                 </a:solidFill>
@@ -9229,9 +9229,9 @@
           <a:p>
             <a:pPr>
               <a:spcAft>
-                <a:spcPts val="600"/>
+                <a:spcPts val="500"/>
               </a:spcAft>
-              <a:defRPr sz="1100">
+              <a:defRPr sz="1060">
                 <a:solidFill>
                   <a:srgbClr val="141414"/>
                 </a:solidFill>
@@ -9244,7 +9244,7 @@
           </a:p>
           <a:p>
             <a:pPr>
-              <a:defRPr sz="1050" b="1">
+              <a:defRPr sz="1019" b="1">
                 <a:solidFill>
                   <a:srgbClr val="000000"/>
                 </a:solidFill>
@@ -9252,7 +9252,7 @@
               </a:defRPr>
             </a:pPr>
             <a:r>
-              <a:t>💡 Tips Praktik: Gunakan DartPad jika laptop lab sedang lemot atau belum terpasang Flutter SDK!</a:t>
+              <a:t>💡 Tips Praktis: Gunakan DartPad jika laptop lab sedang lemot atau belum terpasang Flutter SDK!</a:t>
             </a:r>
           </a:p>
         </p:txBody>
@@ -9360,7 +9360,7 @@
             <a:avLst/>
           </a:prstGeom>
           <a:solidFill>
-            <a:srgbClr val="FFE600"/>
+            <a:srgbClr val="4ADE80"/>
           </a:solidFill>
           <a:ln w="31750">
             <a:solidFill>
@@ -9421,7 +9421,7 @@
               </a:defRPr>
             </a:pPr>
             <a:r>
-              <a:t>terminal_dartpad.sh  |  DART CODE RUNNABLE</a:t>
+              <a:t>terminal_dartpad.sh  |  KODE IMPLEMENTASI</a:t>
             </a:r>
           </a:p>
         </p:txBody>
@@ -9449,7 +9449,7 @@
           <a:lstStyle/>
           <a:p>
             <a:pPr>
-              <a:defRPr sz="919">
+              <a:defRPr sz="910">
                 <a:solidFill>
                   <a:srgbClr val="F5F5F5"/>
                 </a:solidFill>
@@ -9971,15 +9971,15 @@
               </a:defRPr>
             </a:pPr>
             <a:r>
-              <a:t>KONSEP &amp; CARA KERJA</a:t>
+              <a:t>KONSEP &amp; ALUR KERJA</a:t>
             </a:r>
           </a:p>
           <a:p>
             <a:pPr>
               <a:spcAft>
-                <a:spcPts val="600"/>
+                <a:spcPts val="500"/>
               </a:spcAft>
-              <a:defRPr sz="1100">
+              <a:defRPr sz="1060">
                 <a:solidFill>
                   <a:srgbClr val="141414"/>
                 </a:solidFill>
@@ -9993,9 +9993,9 @@
           <a:p>
             <a:pPr>
               <a:spcAft>
-                <a:spcPts val="600"/>
+                <a:spcPts val="500"/>
               </a:spcAft>
-              <a:defRPr sz="1100">
+              <a:defRPr sz="1060">
                 <a:solidFill>
                   <a:srgbClr val="141414"/>
                 </a:solidFill>
@@ -10009,9 +10009,9 @@
           <a:p>
             <a:pPr>
               <a:spcAft>
-                <a:spcPts val="600"/>
+                <a:spcPts val="500"/>
               </a:spcAft>
-              <a:defRPr sz="1100">
+              <a:defRPr sz="1060">
                 <a:solidFill>
                   <a:srgbClr val="141414"/>
                 </a:solidFill>
@@ -10025,9 +10025,9 @@
           <a:p>
             <a:pPr>
               <a:spcAft>
-                <a:spcPts val="600"/>
+                <a:spcPts val="500"/>
               </a:spcAft>
-              <a:defRPr sz="1100">
+              <a:defRPr sz="1060">
                 <a:solidFill>
                   <a:srgbClr val="141414"/>
                 </a:solidFill>
@@ -10040,7 +10040,7 @@
           </a:p>
           <a:p>
             <a:pPr>
-              <a:defRPr sz="1050" b="1">
+              <a:defRPr sz="1019" b="1">
                 <a:solidFill>
                   <a:srgbClr val="000000"/>
                 </a:solidFill>
@@ -10048,7 +10048,7 @@
               </a:defRPr>
             </a:pPr>
             <a:r>
-              <a:t>💡 Tips Praktik: Logika Dart yang kuat akan membuat Anda sangat mudah menguasai State Management di Minggu ke-6!</a:t>
+              <a:t>💡 Tips Praktis: Logika Dart yang kuat akan membuat Anda sangat mudah menguasai State Management di Minggu ke-6!</a:t>
             </a:r>
           </a:p>
         </p:txBody>
@@ -10217,7 +10217,7 @@
               </a:defRPr>
             </a:pPr>
             <a:r>
-              <a:t>mindset_dart.dart  |  DART CODE RUNNABLE</a:t>
+              <a:t>mindset_dart.dart  |  KODE IMPLEMENTASI</a:t>
             </a:r>
           </a:p>
         </p:txBody>
@@ -10245,7 +10245,7 @@
           <a:lstStyle/>
           <a:p>
             <a:pPr>
-              <a:defRPr sz="919">
+              <a:defRPr sz="910">
                 <a:solidFill>
                   <a:srgbClr val="F5F5F5"/>
                 </a:solidFill>
@@ -10773,15 +10773,15 @@
               </a:defRPr>
             </a:pPr>
             <a:r>
-              <a:t>KONSEP &amp; CARA KERJA</a:t>
+              <a:t>KONSEP &amp; ALUR KERJA</a:t>
             </a:r>
           </a:p>
           <a:p>
             <a:pPr>
               <a:spcAft>
-                <a:spcPts val="600"/>
+                <a:spcPts val="500"/>
               </a:spcAft>
-              <a:defRPr sz="1100">
+              <a:defRPr sz="1060">
                 <a:solidFill>
                   <a:srgbClr val="141414"/>
                 </a:solidFill>
@@ -10795,9 +10795,9 @@
           <a:p>
             <a:pPr>
               <a:spcAft>
-                <a:spcPts val="600"/>
+                <a:spcPts val="500"/>
               </a:spcAft>
-              <a:defRPr sz="1100">
+              <a:defRPr sz="1060">
                 <a:solidFill>
                   <a:srgbClr val="141414"/>
                 </a:solidFill>
@@ -10811,9 +10811,9 @@
           <a:p>
             <a:pPr>
               <a:spcAft>
-                <a:spcPts val="600"/>
+                <a:spcPts val="500"/>
               </a:spcAft>
-              <a:defRPr sz="1100">
+              <a:defRPr sz="1060">
                 <a:solidFill>
                   <a:srgbClr val="141414"/>
                 </a:solidFill>
@@ -10827,9 +10827,9 @@
           <a:p>
             <a:pPr>
               <a:spcAft>
-                <a:spcPts val="600"/>
+                <a:spcPts val="500"/>
               </a:spcAft>
-              <a:defRPr sz="1100">
+              <a:defRPr sz="1060">
                 <a:solidFill>
                   <a:srgbClr val="141414"/>
                 </a:solidFill>
@@ -10843,9 +10843,9 @@
           <a:p>
             <a:pPr>
               <a:spcAft>
-                <a:spcPts val="600"/>
+                <a:spcPts val="500"/>
               </a:spcAft>
-              <a:defRPr sz="1100">
+              <a:defRPr sz="1060">
                 <a:solidFill>
                   <a:srgbClr val="141414"/>
                 </a:solidFill>
@@ -10858,7 +10858,7 @@
           </a:p>
           <a:p>
             <a:pPr>
-              <a:defRPr sz="1050" b="1">
+              <a:defRPr sz="1019" b="1">
                 <a:solidFill>
                   <a:srgbClr val="000000"/>
                 </a:solidFill>
@@ -10866,7 +10866,7 @@
               </a:defRPr>
             </a:pPr>
             <a:r>
-              <a:t>💡 Tips Praktik: Di Flutter, selalu pasang 'const' pada widget statis agar performa aplikasi sangat hemat RAM!</a:t>
+              <a:t>💡 Tips Praktis: Di Flutter, selalu pasang 'const' pada widget statis agar performa aplikasi sangat hemat RAM!</a:t>
             </a:r>
           </a:p>
         </p:txBody>
@@ -10974,7 +10974,7 @@
             <a:avLst/>
           </a:prstGeom>
           <a:solidFill>
-            <a:srgbClr val="FFE600"/>
+            <a:srgbClr val="38BDF8"/>
           </a:solidFill>
           <a:ln w="31750">
             <a:solidFill>
@@ -11035,7 +11035,7 @@
               </a:defRPr>
             </a:pPr>
             <a:r>
-              <a:t>variabel_dasar.dart  |  DART CODE RUNNABLE</a:t>
+              <a:t>variabel_dasar.dart  |  KODE IMPLEMENTASI</a:t>
             </a:r>
           </a:p>
         </p:txBody>
@@ -11063,7 +11063,7 @@
           <a:lstStyle/>
           <a:p>
             <a:pPr>
-              <a:defRPr sz="919">
+              <a:defRPr sz="910">
                 <a:solidFill>
                   <a:srgbClr val="F5F5F5"/>
                 </a:solidFill>
@@ -11593,15 +11593,15 @@
               </a:defRPr>
             </a:pPr>
             <a:r>
-              <a:t>KONSEP &amp; CARA KERJA</a:t>
+              <a:t>KONSEP &amp; ALUR KERJA</a:t>
             </a:r>
           </a:p>
           <a:p>
             <a:pPr>
               <a:spcAft>
-                <a:spcPts val="600"/>
+                <a:spcPts val="500"/>
               </a:spcAft>
-              <a:defRPr sz="1100">
+              <a:defRPr sz="1060">
                 <a:solidFill>
                   <a:srgbClr val="141414"/>
                 </a:solidFill>
@@ -11615,9 +11615,9 @@
           <a:p>
             <a:pPr>
               <a:spcAft>
-                <a:spcPts val="600"/>
+                <a:spcPts val="500"/>
               </a:spcAft>
-              <a:defRPr sz="1100">
+              <a:defRPr sz="1060">
                 <a:solidFill>
                   <a:srgbClr val="141414"/>
                 </a:solidFill>
@@ -11631,9 +11631,9 @@
           <a:p>
             <a:pPr>
               <a:spcAft>
-                <a:spcPts val="600"/>
+                <a:spcPts val="500"/>
               </a:spcAft>
-              <a:defRPr sz="1100">
+              <a:defRPr sz="1060">
                 <a:solidFill>
                   <a:srgbClr val="141414"/>
                 </a:solidFill>
@@ -11647,9 +11647,9 @@
           <a:p>
             <a:pPr>
               <a:spcAft>
-                <a:spcPts val="600"/>
+                <a:spcPts val="500"/>
               </a:spcAft>
-              <a:defRPr sz="1100">
+              <a:defRPr sz="1060">
                 <a:solidFill>
                   <a:srgbClr val="141414"/>
                 </a:solidFill>
@@ -11662,7 +11662,7 @@
           </a:p>
           <a:p>
             <a:pPr>
-              <a:defRPr sz="1050" b="1">
+              <a:defRPr sz="1019" b="1">
                 <a:solidFill>
                   <a:srgbClr val="000000"/>
                 </a:solidFill>
@@ -11670,7 +11670,7 @@
               </a:defRPr>
             </a:pPr>
             <a:r>
-              <a:t>💡 Tips Praktik: Gunakan tanda tanya (?) hanya pada data yang memang wajar jika tidak diisi oleh pengguna!</a:t>
+              <a:t>💡 Tips Praktis: Gunakan tanda tanya (?) hanya pada data yang memang wajar jika tidak diisi oleh pengguna!</a:t>
             </a:r>
           </a:p>
         </p:txBody>
@@ -11778,7 +11778,7 @@
             <a:avLst/>
           </a:prstGeom>
           <a:solidFill>
-            <a:srgbClr val="FFE600"/>
+            <a:srgbClr val="FB7185"/>
           </a:solidFill>
           <a:ln w="31750">
             <a:solidFill>
@@ -11839,7 +11839,7 @@
               </a:defRPr>
             </a:pPr>
             <a:r>
-              <a:t>null_safety_intro.dart  |  DART CODE RUNNABLE</a:t>
+              <a:t>null_safety_intro.dart  |  KODE IMPLEMENTASI</a:t>
             </a:r>
           </a:p>
         </p:txBody>
@@ -11867,7 +11867,7 @@
           <a:lstStyle/>
           <a:p>
             <a:pPr>
-              <a:defRPr sz="919">
+              <a:defRPr sz="910">
                 <a:solidFill>
                   <a:srgbClr val="F5F5F5"/>
                 </a:solidFill>
@@ -12397,15 +12397,15 @@
               </a:defRPr>
             </a:pPr>
             <a:r>
-              <a:t>KONSEP &amp; CARA KERJA</a:t>
+              <a:t>KONSEP &amp; ALUR KERJA</a:t>
             </a:r>
           </a:p>
           <a:p>
             <a:pPr>
               <a:spcAft>
-                <a:spcPts val="600"/>
+                <a:spcPts val="500"/>
               </a:spcAft>
-              <a:defRPr sz="1100">
+              <a:defRPr sz="1060">
                 <a:solidFill>
                   <a:srgbClr val="141414"/>
                 </a:solidFill>
@@ -12419,9 +12419,9 @@
           <a:p>
             <a:pPr>
               <a:spcAft>
-                <a:spcPts val="600"/>
+                <a:spcPts val="500"/>
               </a:spcAft>
-              <a:defRPr sz="1100">
+              <a:defRPr sz="1060">
                 <a:solidFill>
                   <a:srgbClr val="141414"/>
                 </a:solidFill>
@@ -12435,9 +12435,9 @@
           <a:p>
             <a:pPr>
               <a:spcAft>
-                <a:spcPts val="600"/>
+                <a:spcPts val="500"/>
               </a:spcAft>
-              <a:defRPr sz="1100">
+              <a:defRPr sz="1060">
                 <a:solidFill>
                   <a:srgbClr val="141414"/>
                 </a:solidFill>
@@ -12451,9 +12451,9 @@
           <a:p>
             <a:pPr>
               <a:spcAft>
-                <a:spcPts val="600"/>
+                <a:spcPts val="500"/>
               </a:spcAft>
-              <a:defRPr sz="1100">
+              <a:defRPr sz="1060">
                 <a:solidFill>
                   <a:srgbClr val="141414"/>
                 </a:solidFill>
@@ -12466,7 +12466,7 @@
           </a:p>
           <a:p>
             <a:pPr>
-              <a:defRPr sz="1050" b="1">
+              <a:defRPr sz="1019" b="1">
                 <a:solidFill>
                   <a:srgbClr val="000000"/>
                 </a:solidFill>
@@ -12474,7 +12474,7 @@
               </a:defRPr>
             </a:pPr>
             <a:r>
-              <a:t>💡 Tips Praktik: Hindari memakai tanda seru (!) jika Anda tidak 100% yakin datanya pasti ada!</a:t>
+              <a:t>💡 Tips Praktis: Hindari memakai tanda seru (!) jika Anda tidak 100% yakin datanya pasti ada!</a:t>
             </a:r>
           </a:p>
         </p:txBody>
@@ -12643,7 +12643,7 @@
               </a:defRPr>
             </a:pPr>
             <a:r>
-              <a:t>null_operators.dart  |  DART CODE RUNNABLE</a:t>
+              <a:t>null_operators.dart  |  KODE IMPLEMENTASI</a:t>
             </a:r>
           </a:p>
         </p:txBody>
@@ -12671,7 +12671,7 @@
           <a:lstStyle/>
           <a:p>
             <a:pPr>
-              <a:defRPr sz="919">
+              <a:defRPr sz="910">
                 <a:solidFill>
                   <a:srgbClr val="F5F5F5"/>
                 </a:solidFill>
@@ -13210,15 +13210,15 @@
               </a:defRPr>
             </a:pPr>
             <a:r>
-              <a:t>KONSEP &amp; CARA KERJA</a:t>
+              <a:t>KONSEP &amp; ALUR KERJA</a:t>
             </a:r>
           </a:p>
           <a:p>
             <a:pPr>
               <a:spcAft>
-                <a:spcPts val="600"/>
+                <a:spcPts val="500"/>
               </a:spcAft>
-              <a:defRPr sz="1100">
+              <a:defRPr sz="1060">
                 <a:solidFill>
                   <a:srgbClr val="141414"/>
                 </a:solidFill>
@@ -13232,9 +13232,9 @@
           <a:p>
             <a:pPr>
               <a:spcAft>
-                <a:spcPts val="600"/>
+                <a:spcPts val="500"/>
               </a:spcAft>
-              <a:defRPr sz="1100">
+              <a:defRPr sz="1060">
                 <a:solidFill>
                   <a:srgbClr val="141414"/>
                 </a:solidFill>
@@ -13248,9 +13248,9 @@
           <a:p>
             <a:pPr>
               <a:spcAft>
-                <a:spcPts val="600"/>
+                <a:spcPts val="500"/>
               </a:spcAft>
-              <a:defRPr sz="1100">
+              <a:defRPr sz="1060">
                 <a:solidFill>
                   <a:srgbClr val="141414"/>
                 </a:solidFill>
@@ -13264,9 +13264,9 @@
           <a:p>
             <a:pPr>
               <a:spcAft>
-                <a:spcPts val="600"/>
+                <a:spcPts val="500"/>
               </a:spcAft>
-              <a:defRPr sz="1100">
+              <a:defRPr sz="1060">
                 <a:solidFill>
                   <a:srgbClr val="141414"/>
                 </a:solidFill>
@@ -13279,7 +13279,7 @@
           </a:p>
           <a:p>
             <a:pPr>
-              <a:defRPr sz="1050" b="1">
+              <a:defRPr sz="1019" b="1">
                 <a:solidFill>
                   <a:srgbClr val="000000"/>
                 </a:solidFill>
@@ -13287,7 +13287,7 @@
               </a:defRPr>
             </a:pPr>
             <a:r>
-              <a:t>💡 Tips Praktik: Gunakan fat arrow '=&gt;' untuk fungsi sederhana agar kode Flutter Anda terlihat profesional!</a:t>
+              <a:t>💡 Tips Praktis: Gunakan fat arrow '=&gt;' untuk fungsi sederhana agar kode Flutter Anda terlihat profesional!</a:t>
             </a:r>
           </a:p>
         </p:txBody>
@@ -13395,7 +13395,7 @@
             <a:avLst/>
           </a:prstGeom>
           <a:solidFill>
-            <a:srgbClr val="FFE600"/>
+            <a:srgbClr val="4ADE80"/>
           </a:solidFill>
           <a:ln w="31750">
             <a:solidFill>
@@ -13456,7 +13456,7 @@
               </a:defRPr>
             </a:pPr>
             <a:r>
-              <a:t>fat_arrow_demo.dart  |  DART CODE RUNNABLE</a:t>
+              <a:t>fat_arrow_demo.dart  |  KODE IMPLEMENTASI</a:t>
             </a:r>
           </a:p>
         </p:txBody>
@@ -13484,7 +13484,7 @@
           <a:lstStyle/>
           <a:p>
             <a:pPr>
-              <a:defRPr sz="919">
+              <a:defRPr sz="910">
                 <a:solidFill>
                   <a:srgbClr val="F5F5F5"/>
                 </a:solidFill>
@@ -14006,15 +14006,15 @@
               </a:defRPr>
             </a:pPr>
             <a:r>
-              <a:t>KONSEP &amp; CARA KERJA</a:t>
+              <a:t>KONSEP &amp; ALUR KERJA</a:t>
             </a:r>
           </a:p>
           <a:p>
             <a:pPr>
               <a:spcAft>
-                <a:spcPts val="600"/>
+                <a:spcPts val="500"/>
               </a:spcAft>
-              <a:defRPr sz="1100">
+              <a:defRPr sz="1060">
                 <a:solidFill>
                   <a:srgbClr val="141414"/>
                 </a:solidFill>
@@ -14028,9 +14028,9 @@
           <a:p>
             <a:pPr>
               <a:spcAft>
-                <a:spcPts val="600"/>
+                <a:spcPts val="500"/>
               </a:spcAft>
-              <a:defRPr sz="1100">
+              <a:defRPr sz="1060">
                 <a:solidFill>
                   <a:srgbClr val="141414"/>
                 </a:solidFill>
@@ -14044,9 +14044,9 @@
           <a:p>
             <a:pPr>
               <a:spcAft>
-                <a:spcPts val="600"/>
+                <a:spcPts val="500"/>
               </a:spcAft>
-              <a:defRPr sz="1100">
+              <a:defRPr sz="1060">
                 <a:solidFill>
                   <a:srgbClr val="141414"/>
                 </a:solidFill>
@@ -14060,9 +14060,9 @@
           <a:p>
             <a:pPr>
               <a:spcAft>
-                <a:spcPts val="600"/>
+                <a:spcPts val="500"/>
               </a:spcAft>
-              <a:defRPr sz="1100">
+              <a:defRPr sz="1060">
                 <a:solidFill>
                   <a:srgbClr val="141414"/>
                 </a:solidFill>
@@ -14075,7 +14075,7 @@
           </a:p>
           <a:p>
             <a:pPr>
-              <a:defRPr sz="1050" b="1">
+              <a:defRPr sz="1019" b="1">
                 <a:solidFill>
                   <a:srgbClr val="000000"/>
                 </a:solidFill>
@@ -14083,7 +14083,7 @@
               </a:defRPr>
             </a:pPr>
             <a:r>
-              <a:t>💡 Tips Praktik: Semua widget seperti Text(data), Container(padding: ...), Row(children: ...) memakai named parameters!</a:t>
+              <a:t>💡 Tips Praktis: Semua widget seperti Text(data), Container(padding: ...), Row(children: ...) memakai named parameters!</a:t>
             </a:r>
           </a:p>
         </p:txBody>
@@ -14191,7 +14191,7 @@
             <a:avLst/>
           </a:prstGeom>
           <a:solidFill>
-            <a:srgbClr val="FFE600"/>
+            <a:srgbClr val="38BDF8"/>
           </a:solidFill>
           <a:ln w="31750">
             <a:solidFill>
@@ -14252,7 +14252,7 @@
               </a:defRPr>
             </a:pPr>
             <a:r>
-              <a:t>oop_named_params.dart  |  DART CODE RUNNABLE</a:t>
+              <a:t>oop_named_params.dart  |  KODE IMPLEMENTASI</a:t>
             </a:r>
           </a:p>
         </p:txBody>
@@ -14280,7 +14280,7 @@
           <a:lstStyle/>
           <a:p>
             <a:pPr>
-              <a:defRPr sz="919">
+              <a:defRPr sz="910">
                 <a:solidFill>
                   <a:srgbClr val="F5F5F5"/>
                 </a:solidFill>
@@ -14834,15 +14834,15 @@
               </a:defRPr>
             </a:pPr>
             <a:r>
-              <a:t>KONSEP &amp; CARA KERJA</a:t>
+              <a:t>KONSEP &amp; ALUR KERJA</a:t>
             </a:r>
           </a:p>
           <a:p>
             <a:pPr>
               <a:spcAft>
-                <a:spcPts val="600"/>
+                <a:spcPts val="500"/>
               </a:spcAft>
-              <a:defRPr sz="1100">
+              <a:defRPr sz="1060">
                 <a:solidFill>
                   <a:srgbClr val="141414"/>
                 </a:solidFill>
@@ -14856,9 +14856,9 @@
           <a:p>
             <a:pPr>
               <a:spcAft>
-                <a:spcPts val="600"/>
+                <a:spcPts val="500"/>
               </a:spcAft>
-              <a:defRPr sz="1100">
+              <a:defRPr sz="1060">
                 <a:solidFill>
                   <a:srgbClr val="141414"/>
                 </a:solidFill>
@@ -14872,9 +14872,9 @@
           <a:p>
             <a:pPr>
               <a:spcAft>
-                <a:spcPts val="600"/>
+                <a:spcPts val="500"/>
               </a:spcAft>
-              <a:defRPr sz="1100">
+              <a:defRPr sz="1060">
                 <a:solidFill>
                   <a:srgbClr val="141414"/>
                 </a:solidFill>
@@ -14888,9 +14888,9 @@
           <a:p>
             <a:pPr>
               <a:spcAft>
-                <a:spcPts val="600"/>
+                <a:spcPts val="500"/>
               </a:spcAft>
-              <a:defRPr sz="1100">
+              <a:defRPr sz="1060">
                 <a:solidFill>
                   <a:srgbClr val="141414"/>
                 </a:solidFill>
@@ -14903,7 +14903,7 @@
           </a:p>
           <a:p>
             <a:pPr>
-              <a:defRPr sz="1050" b="1">
+              <a:defRPr sz="1019" b="1">
                 <a:solidFill>
                   <a:srgbClr val="000000"/>
                 </a:solidFill>
@@ -14911,7 +14911,7 @@
               </a:defRPr>
             </a:pPr>
             <a:r>
-              <a:t>💡 Tips Praktik: Anggap mixin seperti ransel perkakas: class Anda bisa memakai ransel itu kapan saja dibutuhkan!</a:t>
+              <a:t>💡 Tips Praktis: Anggap mixin seperti ransel perkakas: class Anda bisa memakai ransel itu kapan saja dibutuhkan!</a:t>
             </a:r>
           </a:p>
         </p:txBody>
@@ -15019,7 +15019,7 @@
             <a:avLst/>
           </a:prstGeom>
           <a:solidFill>
-            <a:srgbClr val="FFE600"/>
+            <a:srgbClr val="C084FC"/>
           </a:solidFill>
           <a:ln w="31750">
             <a:solidFill>
@@ -15080,7 +15080,7 @@
               </a:defRPr>
             </a:pPr>
             <a:r>
-              <a:t>mixins_demo.dart  |  DART CODE RUNNABLE</a:t>
+              <a:t>mixins_demo.dart  |  KODE IMPLEMENTASI</a:t>
             </a:r>
           </a:p>
         </p:txBody>
@@ -15108,7 +15108,7 @@
           <a:lstStyle/>
           <a:p>
             <a:pPr>
-              <a:defRPr sz="919">
+              <a:defRPr sz="910">
                 <a:solidFill>
                   <a:srgbClr val="F5F5F5"/>
                 </a:solidFill>
